--- a/assignment10/nbodyproblem/nbody_scaling_presentation.pptx
+++ b/assignment10/nbodyproblem/nbody_scaling_presentation.pptx
@@ -4,6 +4,9 @@
   <p:sldMasterIdLst>
     <p:sldMasterId id="2147483648" r:id="rId1"/>
   </p:sldMasterIdLst>
+  <p:notesMasterIdLst>
+    <p:notesMasterId r:id="rId10"/>
+  </p:notesMasterIdLst>
   <p:sldIdLst>
     <p:sldId id="256" r:id="rId2"/>
     <p:sldId id="257" r:id="rId3"/>
@@ -14,10 +17,7 @@
     <p:sldId id="262" r:id="rId8"/>
     <p:sldId id="263" r:id="rId9"/>
   </p:sldIdLst>
-  <p:notesMasterIdLst>
-    <p:notesMasterId r:id="rId10"/>
-  </p:notesMasterIdLst>
-  <p:sldSz cx="9144000" cy="5143500"/>
+  <p:sldSz cx="9144000" cy="5143500" type="screen16x9"/>
   <p:notesSz cx="5143500" cy="9144000"/>
   <p:defaultTextStyle>
     <a:lvl1pPr marL="0" algn="l" defTabSz="914400" rtl="0" eaLnBrk="1" latinLnBrk="0" hangingPunct="1">
@@ -111,18 +111,26 @@
       </a:defRPr>
     </a:lvl9pPr>
   </p:defaultTextStyle>
+  <p:extLst>
+    <p:ext uri="{EFAFB233-063F-42B5-8137-9DF3F51BA10A}">
+      <p15:sldGuideLst xmlns:p15="http://schemas.microsoft.com/office/powerpoint/2012/main"/>
+    </p:ext>
+  </p:extLst>
 </p:presentation>
 </file>
 
 <file path=ppt/charts/chart1.xml><?xml version="1.0" encoding="utf-8"?>
-<c:chartSpace xmlns:c="http://schemas.openxmlformats.org/drawingml/2006/chart" xmlns:a="http://schemas.openxmlformats.org/drawingml/2006/main" xmlns:r="http://schemas.openxmlformats.org/officeDocument/2006/relationships">
+<c:chartSpace xmlns:c="http://schemas.openxmlformats.org/drawingml/2006/chart" xmlns:a="http://schemas.openxmlformats.org/drawingml/2006/main" xmlns:r="http://schemas.openxmlformats.org/officeDocument/2006/relationships" xmlns:c16r2="http://schemas.microsoft.com/office/drawing/2015/06/chart">
   <c:date1904 val="0"/>
+  <c:lang val="en-US"/>
   <c:roundedCorners val="0"/>
+  <c:style val="2"/>
   <c:chart>
     <c:autoTitleDeleted val="1"/>
     <c:plotArea>
       <c:layout/>
       <c:lineChart>
+        <c:grouping val="standard"/>
         <c:varyColors val="0"/>
         <c:ser>
           <c:idx val="0"/>
@@ -139,9 +147,6 @@
             </c:strRef>
           </c:tx>
           <c:spPr>
-            <a:solidFill>
-              <a:srgbClr val="06B6D4"/>
-            </a:solidFill>
             <a:ln w="25400" cap="flat">
               <a:solidFill>
                 <a:srgbClr val="06B6D4"/>
@@ -151,31 +156,6 @@
             </a:ln>
             <a:effectLst/>
           </c:spPr>
-          <c:invertIfNegative val="0"/>
-          <c:dLbls>
-            <c:numFmt formatCode="#,##0" sourceLinked="0"/>
-            <c:txPr>
-              <a:bodyPr/>
-              <a:lstStyle/>
-              <a:p>
-                <a:pPr>
-                  <a:defRPr b="0" i="0" strike="noStrike" sz="1200" u="none">
-                    <a:solidFill>
-                      <a:srgbClr val="000000"/>
-                    </a:solidFill>
-                    <a:latin typeface="Arial"/>
-                  </a:defRPr>
-                </a:pPr>
-              </a:p>
-            </c:txPr>
-            <c:showLegendKey val="0"/>
-            <c:showVal val="0"/>
-            <c:showCatName val="0"/>
-            <c:showSerName val="0"/>
-            <c:showPercent val="0"/>
-            <c:showBubbleSize val="0"/>
-            <c:showLeaderLines val="0"/>
-          </c:dLbls>
           <c:marker>
             <c:symbol val="circle"/>
             <c:size val="6"/>
@@ -194,47 +174,45 @@
             </c:spPr>
           </c:marker>
           <c:cat>
-            <c:multiLvlStrRef>
+            <c:strRef>
               <c:f>Sheet1!$A$2:$A$12</c:f>
-              <c:multiLvlStrCache>
+              <c:strCache>
                 <c:ptCount val="11"/>
-                <c:lvl>
-                  <c:pt idx="0">
-                    <c:v>1</c:v>
-                  </c:pt>
-                  <c:pt idx="1">
-                    <c:v>2</c:v>
-                  </c:pt>
-                  <c:pt idx="2">
-                    <c:v>3</c:v>
-                  </c:pt>
-                  <c:pt idx="3">
-                    <c:v>4</c:v>
-                  </c:pt>
-                  <c:pt idx="4">
-                    <c:v>6</c:v>
-                  </c:pt>
-                  <c:pt idx="5">
-                    <c:v>8</c:v>
-                  </c:pt>
-                  <c:pt idx="6">
-                    <c:v>10</c:v>
-                  </c:pt>
-                  <c:pt idx="7">
-                    <c:v>12</c:v>
-                  </c:pt>
-                  <c:pt idx="8">
-                    <c:v>16</c:v>
-                  </c:pt>
-                  <c:pt idx="9">
-                    <c:v>20</c:v>
-                  </c:pt>
-                  <c:pt idx="10">
-                    <c:v>24</c:v>
-                  </c:pt>
-                </c:lvl>
-              </c:multiLvlStrCache>
-            </c:multiLvlStrRef>
+                <c:pt idx="0">
+                  <c:v>1</c:v>
+                </c:pt>
+                <c:pt idx="1">
+                  <c:v>2</c:v>
+                </c:pt>
+                <c:pt idx="2">
+                  <c:v>3</c:v>
+                </c:pt>
+                <c:pt idx="3">
+                  <c:v>4</c:v>
+                </c:pt>
+                <c:pt idx="4">
+                  <c:v>6</c:v>
+                </c:pt>
+                <c:pt idx="5">
+                  <c:v>8</c:v>
+                </c:pt>
+                <c:pt idx="6">
+                  <c:v>10</c:v>
+                </c:pt>
+                <c:pt idx="7">
+                  <c:v>12</c:v>
+                </c:pt>
+                <c:pt idx="8">
+                  <c:v>16</c:v>
+                </c:pt>
+                <c:pt idx="9">
+                  <c:v>20</c:v>
+                </c:pt>
+                <c:pt idx="10">
+                  <c:v>24</c:v>
+                </c:pt>
+              </c:strCache>
+            </c:strRef>
           </c:cat>
           <c:val>
             <c:numRef>
@@ -249,19 +227,19 @@
                   <c:v>1.52</c:v>
                 </c:pt>
                 <c:pt idx="2">
-                  <c:v>1.622</c:v>
+                  <c:v>1.6220000000000001</c:v>
                 </c:pt>
                 <c:pt idx="3">
                   <c:v>1.895</c:v>
                 </c:pt>
                 <c:pt idx="4">
-                  <c:v>1.803</c:v>
+                  <c:v>1.8029999999999999</c:v>
                 </c:pt>
                 <c:pt idx="5">
-                  <c:v>1.918</c:v>
+                  <c:v>1.9179999999999999</c:v>
                 </c:pt>
                 <c:pt idx="6">
-                  <c:v>1.719</c:v>
+                  <c:v>1.7190000000000001</c:v>
                 </c:pt>
                 <c:pt idx="7">
                   <c:v>1.71</c:v>
@@ -270,7 +248,7 @@
                   <c:v>1.554</c:v>
                 </c:pt>
                 <c:pt idx="9">
-                  <c:v>1.396</c:v>
+                  <c:v>1.3959999999999999</c:v>
                 </c:pt>
                 <c:pt idx="10">
                   <c:v>1.415</c:v>
@@ -279,6 +257,11 @@
             </c:numRef>
           </c:val>
           <c:smooth val="0"/>
+          <c:extLst>
+            <c:ext xmlns:c16="http://schemas.microsoft.com/office/drawing/2014/chart" uri="{C3380CC4-5D6E-409C-BE32-E72D297353CC}">
+              <c16:uniqueId val="{00000000-419A-412F-9F9F-8D8500456D42}"/>
+            </c:ext>
+          </c:extLst>
         </c:ser>
         <c:ser>
           <c:idx val="1"/>
@@ -295,9 +278,6 @@
             </c:strRef>
           </c:tx>
           <c:spPr>
-            <a:solidFill>
-              <a:srgbClr val="8B5CF6"/>
-            </a:solidFill>
             <a:ln w="25400" cap="flat">
               <a:solidFill>
                 <a:srgbClr val="8B5CF6"/>
@@ -307,31 +287,6 @@
             </a:ln>
             <a:effectLst/>
           </c:spPr>
-          <c:invertIfNegative val="0"/>
-          <c:dLbls>
-            <c:numFmt formatCode="#,##0" sourceLinked="0"/>
-            <c:txPr>
-              <a:bodyPr/>
-              <a:lstStyle/>
-              <a:p>
-                <a:pPr>
-                  <a:defRPr b="0" i="0" strike="noStrike" sz="1200" u="none">
-                    <a:solidFill>
-                      <a:srgbClr val="000000"/>
-                    </a:solidFill>
-                    <a:latin typeface="Arial"/>
-                  </a:defRPr>
-                </a:pPr>
-              </a:p>
-            </c:txPr>
-            <c:showLegendKey val="0"/>
-            <c:showVal val="0"/>
-            <c:showCatName val="0"/>
-            <c:showSerName val="0"/>
-            <c:showPercent val="0"/>
-            <c:showBubbleSize val="0"/>
-            <c:showLeaderLines val="0"/>
-          </c:dLbls>
           <c:marker>
             <c:symbol val="circle"/>
             <c:size val="6"/>
@@ -350,47 +305,45 @@
             </c:spPr>
           </c:marker>
           <c:cat>
-            <c:multiLvlStrRef>
+            <c:strRef>
               <c:f>Sheet1!$A$2:$A$12</c:f>
-              <c:multiLvlStrCache>
+              <c:strCache>
                 <c:ptCount val="11"/>
-                <c:lvl>
-                  <c:pt idx="0">
-                    <c:v>1</c:v>
-                  </c:pt>
-                  <c:pt idx="1">
-                    <c:v>2</c:v>
-                  </c:pt>
-                  <c:pt idx="2">
-                    <c:v>3</c:v>
-                  </c:pt>
-                  <c:pt idx="3">
-                    <c:v>4</c:v>
-                  </c:pt>
-                  <c:pt idx="4">
-                    <c:v>6</c:v>
-                  </c:pt>
-                  <c:pt idx="5">
-                    <c:v>8</c:v>
-                  </c:pt>
-                  <c:pt idx="6">
-                    <c:v>10</c:v>
-                  </c:pt>
-                  <c:pt idx="7">
-                    <c:v>12</c:v>
-                  </c:pt>
-                  <c:pt idx="8">
-                    <c:v>16</c:v>
-                  </c:pt>
-                  <c:pt idx="9">
-                    <c:v>20</c:v>
-                  </c:pt>
-                  <c:pt idx="10">
-                    <c:v>24</c:v>
-                  </c:pt>
-                </c:lvl>
-              </c:multiLvlStrCache>
-            </c:multiLvlStrRef>
+                <c:pt idx="0">
+                  <c:v>1</c:v>
+                </c:pt>
+                <c:pt idx="1">
+                  <c:v>2</c:v>
+                </c:pt>
+                <c:pt idx="2">
+                  <c:v>3</c:v>
+                </c:pt>
+                <c:pt idx="3">
+                  <c:v>4</c:v>
+                </c:pt>
+                <c:pt idx="4">
+                  <c:v>6</c:v>
+                </c:pt>
+                <c:pt idx="5">
+                  <c:v>8</c:v>
+                </c:pt>
+                <c:pt idx="6">
+                  <c:v>10</c:v>
+                </c:pt>
+                <c:pt idx="7">
+                  <c:v>12</c:v>
+                </c:pt>
+                <c:pt idx="8">
+                  <c:v>16</c:v>
+                </c:pt>
+                <c:pt idx="9">
+                  <c:v>20</c:v>
+                </c:pt>
+                <c:pt idx="10">
+                  <c:v>24</c:v>
+                </c:pt>
+              </c:strCache>
+            </c:strRef>
           </c:cat>
           <c:val>
             <c:numRef>
@@ -405,36 +358,41 @@
                   <c:v>1.831</c:v>
                 </c:pt>
                 <c:pt idx="2">
-                  <c:v>2.373</c:v>
+                  <c:v>2.3730000000000002</c:v>
                 </c:pt>
                 <c:pt idx="3">
-                  <c:v>2.884</c:v>
+                  <c:v>2.8839999999999999</c:v>
                 </c:pt>
                 <c:pt idx="4">
                   <c:v>3.488</c:v>
                 </c:pt>
                 <c:pt idx="5">
-                  <c:v>3.838</c:v>
+                  <c:v>3.8380000000000001</c:v>
                 </c:pt>
                 <c:pt idx="6">
-                  <c:v>3.844</c:v>
+                  <c:v>3.8439999999999999</c:v>
                 </c:pt>
                 <c:pt idx="7">
-                  <c:v>4.108</c:v>
+                  <c:v>4.1079999999999997</c:v>
                 </c:pt>
                 <c:pt idx="8">
-                  <c:v>3.546</c:v>
+                  <c:v>3.5459999999999998</c:v>
                 </c:pt>
                 <c:pt idx="9">
-                  <c:v>3.454</c:v>
+                  <c:v>3.4540000000000002</c:v>
                 </c:pt>
                 <c:pt idx="10">
-                  <c:v>3.216</c:v>
+                  <c:v>3.2160000000000002</c:v>
                 </c:pt>
               </c:numCache>
             </c:numRef>
           </c:val>
           <c:smooth val="0"/>
+          <c:extLst>
+            <c:ext xmlns:c16="http://schemas.microsoft.com/office/drawing/2014/chart" uri="{C3380CC4-5D6E-409C-BE32-E72D297353CC}">
+              <c16:uniqueId val="{00000001-419A-412F-9F9F-8D8500456D42}"/>
+            </c:ext>
+          </c:extLst>
         </c:ser>
         <c:ser>
           <c:idx val="2"/>
@@ -451,9 +409,6 @@
             </c:strRef>
           </c:tx>
           <c:spPr>
-            <a:solidFill>
-              <a:srgbClr val="10B981"/>
-            </a:solidFill>
             <a:ln w="25400" cap="flat">
               <a:solidFill>
                 <a:srgbClr val="10B981"/>
@@ -463,31 +418,6 @@
             </a:ln>
             <a:effectLst/>
           </c:spPr>
-          <c:invertIfNegative val="0"/>
-          <c:dLbls>
-            <c:numFmt formatCode="#,##0" sourceLinked="0"/>
-            <c:txPr>
-              <a:bodyPr/>
-              <a:lstStyle/>
-              <a:p>
-                <a:pPr>
-                  <a:defRPr b="0" i="0" strike="noStrike" sz="1200" u="none">
-                    <a:solidFill>
-                      <a:srgbClr val="000000"/>
-                    </a:solidFill>
-                    <a:latin typeface="Arial"/>
-                  </a:defRPr>
-                </a:pPr>
-              </a:p>
-            </c:txPr>
-            <c:showLegendKey val="0"/>
-            <c:showVal val="0"/>
-            <c:showCatName val="0"/>
-            <c:showSerName val="0"/>
-            <c:showPercent val="0"/>
-            <c:showBubbleSize val="0"/>
-            <c:showLeaderLines val="0"/>
-          </c:dLbls>
           <c:marker>
             <c:symbol val="circle"/>
             <c:size val="6"/>
@@ -506,47 +436,45 @@
             </c:spPr>
           </c:marker>
           <c:cat>
-            <c:multiLvlStrRef>
+            <c:strRef>
               <c:f>Sheet1!$A$2:$A$12</c:f>
-              <c:multiLvlStrCache>
+              <c:strCache>
                 <c:ptCount val="11"/>
-                <c:lvl>
-                  <c:pt idx="0">
-                    <c:v>1</c:v>
-                  </c:pt>
-                  <c:pt idx="1">
-                    <c:v>2</c:v>
-                  </c:pt>
-                  <c:pt idx="2">
-                    <c:v>3</c:v>
-                  </c:pt>
-                  <c:pt idx="3">
-                    <c:v>4</c:v>
-                  </c:pt>
-                  <c:pt idx="4">
-                    <c:v>6</c:v>
-                  </c:pt>
-                  <c:pt idx="5">
-                    <c:v>8</c:v>
-                  </c:pt>
-                  <c:pt idx="6">
-                    <c:v>10</c:v>
-                  </c:pt>
-                  <c:pt idx="7">
-                    <c:v>12</c:v>
-                  </c:pt>
-                  <c:pt idx="8">
-                    <c:v>16</c:v>
-                  </c:pt>
-                  <c:pt idx="9">
-                    <c:v>20</c:v>
-                  </c:pt>
-                  <c:pt idx="10">
-                    <c:v>24</c:v>
-                  </c:pt>
-                </c:lvl>
-              </c:multiLvlStrCache>
-            </c:multiLvlStrRef>
+                <c:pt idx="0">
+                  <c:v>1</c:v>
+                </c:pt>
+                <c:pt idx="1">
+                  <c:v>2</c:v>
+                </c:pt>
+                <c:pt idx="2">
+                  <c:v>3</c:v>
+                </c:pt>
+                <c:pt idx="3">
+                  <c:v>4</c:v>
+                </c:pt>
+                <c:pt idx="4">
+                  <c:v>6</c:v>
+                </c:pt>
+                <c:pt idx="5">
+                  <c:v>8</c:v>
+                </c:pt>
+                <c:pt idx="6">
+                  <c:v>10</c:v>
+                </c:pt>
+                <c:pt idx="7">
+                  <c:v>12</c:v>
+                </c:pt>
+                <c:pt idx="8">
+                  <c:v>16</c:v>
+                </c:pt>
+                <c:pt idx="9">
+                  <c:v>20</c:v>
+                </c:pt>
+                <c:pt idx="10">
+                  <c:v>24</c:v>
+                </c:pt>
+              </c:strCache>
+            </c:strRef>
           </c:cat>
           <c:val>
             <c:numRef>
@@ -558,68 +486,57 @@
                   <c:v>1</c:v>
                 </c:pt>
                 <c:pt idx="1">
-                  <c:v>1.937</c:v>
+                  <c:v>1.9370000000000001</c:v>
                 </c:pt>
                 <c:pt idx="2">
                   <c:v>2.78</c:v>
                 </c:pt>
                 <c:pt idx="3">
-                  <c:v>3.515</c:v>
+                  <c:v>3.5150000000000001</c:v>
                 </c:pt>
                 <c:pt idx="4">
                   <c:v>4.76</c:v>
                 </c:pt>
                 <c:pt idx="5">
-                  <c:v>5.528</c:v>
+                  <c:v>5.5279999999999996</c:v>
                 </c:pt>
                 <c:pt idx="6">
-                  <c:v>6.142</c:v>
+                  <c:v>6.1420000000000003</c:v>
                 </c:pt>
                 <c:pt idx="7">
-                  <c:v>6.474</c:v>
+                  <c:v>6.4740000000000002</c:v>
                 </c:pt>
                 <c:pt idx="8">
-                  <c:v>6.261</c:v>
+                  <c:v>6.2610000000000001</c:v>
                 </c:pt>
                 <c:pt idx="9">
-                  <c:v>6.541</c:v>
+                  <c:v>6.5410000000000004</c:v>
                 </c:pt>
                 <c:pt idx="10">
-                  <c:v>5.489</c:v>
+                  <c:v>5.4889999999999999</c:v>
                 </c:pt>
               </c:numCache>
             </c:numRef>
           </c:val>
           <c:smooth val="0"/>
+          <c:extLst>
+            <c:ext xmlns:c16="http://schemas.microsoft.com/office/drawing/2014/chart" uri="{C3380CC4-5D6E-409C-BE32-E72D297353CC}">
+              <c16:uniqueId val="{00000002-419A-412F-9F9F-8D8500456D42}"/>
+            </c:ext>
+          </c:extLst>
         </c:ser>
         <c:dLbls>
-          <c:numFmt formatCode="#,##0" sourceLinked="0"/>
-          <c:txPr>
-            <a:bodyPr/>
-            <a:lstStyle/>
-            <a:p>
-              <a:pPr>
-                <a:defRPr b="0" i="0" strike="noStrike" sz="1200" u="none">
-                  <a:solidFill>
-                    <a:srgbClr val="000000"/>
-                  </a:solidFill>
-                  <a:latin typeface="Arial"/>
-                </a:defRPr>
-              </a:pPr>
-            </a:p>
-          </c:txPr>
           <c:showLegendKey val="0"/>
           <c:showVal val="0"/>
           <c:showCatName val="0"/>
           <c:showSerName val="0"/>
           <c:showPercent val="0"/>
           <c:showBubbleSize val="0"/>
-          <c:showLeaderLines val="0"/>
         </c:dLbls>
         <c:marker val="1"/>
+        <c:smooth val="0"/>
         <c:axId val="2094734554"/>
         <c:axId val="2094734552"/>
-        <c:axId val="2094734556"/>
       </c:lineChart>
       <c:catAx>
         <c:axId val="2094734554"/>
@@ -643,7 +560,7 @@
                   </a:defRPr>
                 </a:pPr>
                 <a:r>
-                  <a:rPr b="0" i="0" u="none" strike="noStrike">
+                  <a:rPr lang="en-US" b="0" i="0" u="none" strike="noStrike">
                     <a:solidFill>
                       <a:srgbClr val="94A3B8"/>
                     </a:solidFill>
@@ -654,7 +571,6 @@
               </a:p>
             </c:rich>
           </c:tx>
-          <c:layout/>
           <c:overlay val="0"/>
         </c:title>
         <c:numFmt formatCode="General" sourceLinked="1"/>
@@ -689,6 +605,7 @@
         <c:crosses val="autoZero"/>
         <c:auto val="1"/>
         <c:lblAlgn val="ctr"/>
+        <c:lblOffset val="100"/>
         <c:noMultiLvlLbl val="1"/>
       </c:catAx>
       <c:valAx>
@@ -725,7 +642,7 @@
                   </a:defRPr>
                 </a:pPr>
                 <a:r>
-                  <a:rPr b="0" i="0" u="none" strike="noStrike">
+                  <a:rPr lang="en-US" b="0" i="0" u="none" strike="noStrike">
                     <a:solidFill>
                       <a:srgbClr val="94A3B8"/>
                     </a:solidFill>
@@ -736,7 +653,6 @@
               </a:p>
             </c:rich>
           </c:tx>
-          <c:layout/>
           <c:overlay val="0"/>
         </c:title>
         <c:numFmt formatCode="General" sourceLinked="0"/>
@@ -789,7 +705,7 @@
         <a:lstStyle/>
         <a:p>
           <a:pPr>
-            <a:defRPr sz="1100">      </a:defRPr>
+            <a:defRPr sz="1100"/>
           </a:pPr>
           <a:endParaRPr lang="en-US"/>
         </a:p>
@@ -797,6 +713,7 @@
     </c:legend>
     <c:plotVisOnly val="1"/>
     <c:dispBlanksAs val="span"/>
+    <c:showDLblsOverMax val="1"/>
   </c:chart>
   <c:spPr>
     <a:solidFill>
@@ -814,14 +731,17 @@
 </file>
 
 <file path=ppt/charts/chart2.xml><?xml version="1.0" encoding="utf-8"?>
-<c:chartSpace xmlns:c="http://schemas.openxmlformats.org/drawingml/2006/chart" xmlns:a="http://schemas.openxmlformats.org/drawingml/2006/main" xmlns:r="http://schemas.openxmlformats.org/officeDocument/2006/relationships">
+<c:chartSpace xmlns:c="http://schemas.openxmlformats.org/drawingml/2006/chart" xmlns:a="http://schemas.openxmlformats.org/drawingml/2006/main" xmlns:r="http://schemas.openxmlformats.org/officeDocument/2006/relationships" xmlns:c16r2="http://schemas.microsoft.com/office/drawing/2015/06/chart">
   <c:date1904 val="0"/>
+  <c:lang val="en-US"/>
   <c:roundedCorners val="1"/>
+  <c:style val="2"/>
   <c:chart>
     <c:autoTitleDeleted val="1"/>
     <c:plotArea>
       <c:layout/>
       <c:lineChart>
+        <c:grouping val="standard"/>
         <c:varyColors val="0"/>
         <c:ser>
           <c:idx val="0"/>
@@ -838,9 +758,6 @@
             </c:strRef>
           </c:tx>
           <c:spPr>
-            <a:solidFill>
-              <a:srgbClr val="8B5CF6"/>
-            </a:solidFill>
             <a:ln w="25400" cap="flat">
               <a:solidFill>
                 <a:srgbClr val="8B5CF6"/>
@@ -850,31 +767,6 @@
             </a:ln>
             <a:effectLst/>
           </c:spPr>
-          <c:invertIfNegative val="0"/>
-          <c:dLbls>
-            <c:numFmt formatCode="#,##0" sourceLinked="0"/>
-            <c:txPr>
-              <a:bodyPr/>
-              <a:lstStyle/>
-              <a:p>
-                <a:pPr>
-                  <a:defRPr b="0" i="0" strike="noStrike" sz="1200" u="none">
-                    <a:solidFill>
-                      <a:srgbClr val="000000"/>
-                    </a:solidFill>
-                    <a:latin typeface="Arial"/>
-                  </a:defRPr>
-                </a:pPr>
-              </a:p>
-            </c:txPr>
-            <c:showLegendKey val="0"/>
-            <c:showVal val="0"/>
-            <c:showCatName val="0"/>
-            <c:showSerName val="0"/>
-            <c:showPercent val="0"/>
-            <c:showBubbleSize val="0"/>
-            <c:showLeaderLines val="0"/>
-          </c:dLbls>
           <c:marker>
             <c:symbol val="circle"/>
             <c:size val="6"/>
@@ -893,68 +785,66 @@
             </c:spPr>
           </c:marker>
           <c:cat>
-            <c:multiLvlStrRef>
+            <c:strRef>
               <c:f>Sheet1!$A$2:$A$19</c:f>
-              <c:multiLvlStrCache>
+              <c:strCache>
                 <c:ptCount val="18"/>
-                <c:lvl>
-                  <c:pt idx="0">
-                    <c:v>1</c:v>
-                  </c:pt>
-                  <c:pt idx="1">
-                    <c:v>2</c:v>
-                  </c:pt>
-                  <c:pt idx="2">
-                    <c:v>3</c:v>
-                  </c:pt>
-                  <c:pt idx="3">
-                    <c:v>4</c:v>
-                  </c:pt>
-                  <c:pt idx="4">
-                    <c:v>5</c:v>
-                  </c:pt>
-                  <c:pt idx="5">
-                    <c:v>6</c:v>
-                  </c:pt>
-                  <c:pt idx="6">
-                    <c:v>7</c:v>
-                  </c:pt>
-                  <c:pt idx="7">
-                    <c:v>8</c:v>
-                  </c:pt>
-                  <c:pt idx="8">
-                    <c:v>9</c:v>
-                  </c:pt>
-                  <c:pt idx="9">
-                    <c:v>10</c:v>
-                  </c:pt>
-                  <c:pt idx="10">
-                    <c:v>11</c:v>
-                  </c:pt>
-                  <c:pt idx="11">
-                    <c:v>12</c:v>
-                  </c:pt>
-                  <c:pt idx="12">
-                    <c:v>14</c:v>
-                  </c:pt>
-                  <c:pt idx="13">
-                    <c:v>16</c:v>
-                  </c:pt>
-                  <c:pt idx="14">
-                    <c:v>18</c:v>
-                  </c:pt>
-                  <c:pt idx="15">
-                    <c:v>20</c:v>
-                  </c:pt>
-                  <c:pt idx="16">
-                    <c:v>22</c:v>
-                  </c:pt>
-                  <c:pt idx="17">
-                    <c:v>24</c:v>
-                  </c:pt>
-                </c:lvl>
-              </c:multiLvlStrCache>
-            </c:multiLvlStrRef>
+                <c:pt idx="0">
+                  <c:v>1</c:v>
+                </c:pt>
+                <c:pt idx="1">
+                  <c:v>2</c:v>
+                </c:pt>
+                <c:pt idx="2">
+                  <c:v>3</c:v>
+                </c:pt>
+                <c:pt idx="3">
+                  <c:v>4</c:v>
+                </c:pt>
+                <c:pt idx="4">
+                  <c:v>5</c:v>
+                </c:pt>
+                <c:pt idx="5">
+                  <c:v>6</c:v>
+                </c:pt>
+                <c:pt idx="6">
+                  <c:v>7</c:v>
+                </c:pt>
+                <c:pt idx="7">
+                  <c:v>8</c:v>
+                </c:pt>
+                <c:pt idx="8">
+                  <c:v>9</c:v>
+                </c:pt>
+                <c:pt idx="9">
+                  <c:v>10</c:v>
+                </c:pt>
+                <c:pt idx="10">
+                  <c:v>11</c:v>
+                </c:pt>
+                <c:pt idx="11">
+                  <c:v>12</c:v>
+                </c:pt>
+                <c:pt idx="12">
+                  <c:v>14</c:v>
+                </c:pt>
+                <c:pt idx="13">
+                  <c:v>16</c:v>
+                </c:pt>
+                <c:pt idx="14">
+                  <c:v>18</c:v>
+                </c:pt>
+                <c:pt idx="15">
+                  <c:v>20</c:v>
+                </c:pt>
+                <c:pt idx="16">
+                  <c:v>22</c:v>
+                </c:pt>
+                <c:pt idx="17">
+                  <c:v>24</c:v>
+                </c:pt>
+              </c:strCache>
+            </c:strRef>
           </c:cat>
           <c:val>
             <c:numRef>
@@ -966,60 +856,65 @@
                   <c:v>1</c:v>
                 </c:pt>
                 <c:pt idx="1">
-                  <c:v>2.869</c:v>
+                  <c:v>2.8690000000000002</c:v>
                 </c:pt>
                 <c:pt idx="2">
-                  <c:v>4.599</c:v>
+                  <c:v>4.5990000000000002</c:v>
                 </c:pt>
                 <c:pt idx="3">
-                  <c:v>5.982</c:v>
+                  <c:v>5.9820000000000002</c:v>
                 </c:pt>
                 <c:pt idx="4">
-                  <c:v>7.515</c:v>
+                  <c:v>7.5149999999999997</c:v>
                 </c:pt>
                 <c:pt idx="5">
-                  <c:v>8.868</c:v>
+                  <c:v>8.8680000000000003</c:v>
                 </c:pt>
                 <c:pt idx="6">
-                  <c:v>10.575</c:v>
+                  <c:v>10.574999999999999</c:v>
                 </c:pt>
                 <c:pt idx="7">
                   <c:v>12.154</c:v>
                 </c:pt>
                 <c:pt idx="8">
-                  <c:v>13.652</c:v>
+                  <c:v>13.651999999999999</c:v>
                 </c:pt>
                 <c:pt idx="9">
-                  <c:v>15.501</c:v>
+                  <c:v>15.500999999999999</c:v>
                 </c:pt>
                 <c:pt idx="10">
-                  <c:v>14.005</c:v>
+                  <c:v>14.005000000000001</c:v>
                 </c:pt>
                 <c:pt idx="11">
-                  <c:v>15.018</c:v>
+                  <c:v>15.018000000000001</c:v>
                 </c:pt>
                 <c:pt idx="12">
-                  <c:v>17.207</c:v>
+                  <c:v>17.207000000000001</c:v>
                 </c:pt>
                 <c:pt idx="13">
-                  <c:v>30.918</c:v>
+                  <c:v>30.917999999999999</c:v>
                 </c:pt>
                 <c:pt idx="14">
-                  <c:v>21.673</c:v>
+                  <c:v>21.672999999999998</c:v>
                 </c:pt>
                 <c:pt idx="15">
                   <c:v>24.904</c:v>
                 </c:pt>
                 <c:pt idx="16">
-                  <c:v>29.537</c:v>
+                  <c:v>29.536999999999999</c:v>
                 </c:pt>
                 <c:pt idx="17">
-                  <c:v>32.604</c:v>
+                  <c:v>32.603999999999999</c:v>
                 </c:pt>
               </c:numCache>
             </c:numRef>
           </c:val>
           <c:smooth val="0"/>
+          <c:extLst>
+            <c:ext xmlns:c16="http://schemas.microsoft.com/office/drawing/2014/chart" uri="{C3380CC4-5D6E-409C-BE32-E72D297353CC}">
+              <c16:uniqueId val="{00000000-2F6B-4BE5-BAF6-FD3523F0F381}"/>
+            </c:ext>
+          </c:extLst>
         </c:ser>
         <c:ser>
           <c:idx val="1"/>
@@ -1036,9 +931,6 @@
             </c:strRef>
           </c:tx>
           <c:spPr>
-            <a:solidFill>
-              <a:srgbClr val="F59E0B"/>
-            </a:solidFill>
             <a:ln w="25400" cap="flat">
               <a:solidFill>
                 <a:srgbClr val="F59E0B"/>
@@ -1048,31 +940,6 @@
             </a:ln>
             <a:effectLst/>
           </c:spPr>
-          <c:invertIfNegative val="0"/>
-          <c:dLbls>
-            <c:numFmt formatCode="#,##0" sourceLinked="0"/>
-            <c:txPr>
-              <a:bodyPr/>
-              <a:lstStyle/>
-              <a:p>
-                <a:pPr>
-                  <a:defRPr b="0" i="0" strike="noStrike" sz="1200" u="none">
-                    <a:solidFill>
-                      <a:srgbClr val="000000"/>
-                    </a:solidFill>
-                    <a:latin typeface="Arial"/>
-                  </a:defRPr>
-                </a:pPr>
-              </a:p>
-            </c:txPr>
-            <c:showLegendKey val="0"/>
-            <c:showVal val="0"/>
-            <c:showCatName val="0"/>
-            <c:showSerName val="0"/>
-            <c:showPercent val="0"/>
-            <c:showBubbleSize val="0"/>
-            <c:showLeaderLines val="0"/>
-          </c:dLbls>
           <c:marker>
             <c:symbol val="circle"/>
             <c:size val="6"/>
@@ -1091,68 +958,66 @@
             </c:spPr>
           </c:marker>
           <c:cat>
-            <c:multiLvlStrRef>
+            <c:strRef>
               <c:f>Sheet1!$A$2:$A$19</c:f>
-              <c:multiLvlStrCache>
+              <c:strCache>
                 <c:ptCount val="18"/>
-                <c:lvl>
-                  <c:pt idx="0">
-                    <c:v>1</c:v>
-                  </c:pt>
-                  <c:pt idx="1">
-                    <c:v>2</c:v>
-                  </c:pt>
-                  <c:pt idx="2">
-                    <c:v>3</c:v>
-                  </c:pt>
-                  <c:pt idx="3">
-                    <c:v>4</c:v>
-                  </c:pt>
-                  <c:pt idx="4">
-                    <c:v>5</c:v>
-                  </c:pt>
-                  <c:pt idx="5">
-                    <c:v>6</c:v>
-                  </c:pt>
-                  <c:pt idx="6">
-                    <c:v>7</c:v>
-                  </c:pt>
-                  <c:pt idx="7">
-                    <c:v>8</c:v>
-                  </c:pt>
-                  <c:pt idx="8">
-                    <c:v>9</c:v>
-                  </c:pt>
-                  <c:pt idx="9">
-                    <c:v>10</c:v>
-                  </c:pt>
-                  <c:pt idx="10">
-                    <c:v>11</c:v>
-                  </c:pt>
-                  <c:pt idx="11">
-                    <c:v>12</c:v>
-                  </c:pt>
-                  <c:pt idx="12">
-                    <c:v>14</c:v>
-                  </c:pt>
-                  <c:pt idx="13">
-                    <c:v>16</c:v>
-                  </c:pt>
-                  <c:pt idx="14">
-                    <c:v>18</c:v>
-                  </c:pt>
-                  <c:pt idx="15">
-                    <c:v>20</c:v>
-                  </c:pt>
-                  <c:pt idx="16">
-                    <c:v>22</c:v>
-                  </c:pt>
-                  <c:pt idx="17">
-                    <c:v>24</c:v>
-                  </c:pt>
-                </c:lvl>
-              </c:multiLvlStrCache>
-            </c:multiLvlStrRef>
+                <c:pt idx="0">
+                  <c:v>1</c:v>
+                </c:pt>
+                <c:pt idx="1">
+                  <c:v>2</c:v>
+                </c:pt>
+                <c:pt idx="2">
+                  <c:v>3</c:v>
+                </c:pt>
+                <c:pt idx="3">
+                  <c:v>4</c:v>
+                </c:pt>
+                <c:pt idx="4">
+                  <c:v>5</c:v>
+                </c:pt>
+                <c:pt idx="5">
+                  <c:v>6</c:v>
+                </c:pt>
+                <c:pt idx="6">
+                  <c:v>7</c:v>
+                </c:pt>
+                <c:pt idx="7">
+                  <c:v>8</c:v>
+                </c:pt>
+                <c:pt idx="8">
+                  <c:v>9</c:v>
+                </c:pt>
+                <c:pt idx="9">
+                  <c:v>10</c:v>
+                </c:pt>
+                <c:pt idx="10">
+                  <c:v>11</c:v>
+                </c:pt>
+                <c:pt idx="11">
+                  <c:v>12</c:v>
+                </c:pt>
+                <c:pt idx="12">
+                  <c:v>14</c:v>
+                </c:pt>
+                <c:pt idx="13">
+                  <c:v>16</c:v>
+                </c:pt>
+                <c:pt idx="14">
+                  <c:v>18</c:v>
+                </c:pt>
+                <c:pt idx="15">
+                  <c:v>20</c:v>
+                </c:pt>
+                <c:pt idx="16">
+                  <c:v>22</c:v>
+                </c:pt>
+                <c:pt idx="17">
+                  <c:v>24</c:v>
+                </c:pt>
+              </c:strCache>
+            </c:strRef>
           </c:cat>
           <c:val>
             <c:numRef>
@@ -1218,35 +1083,24 @@
             </c:numRef>
           </c:val>
           <c:smooth val="0"/>
+          <c:extLst>
+            <c:ext xmlns:c16="http://schemas.microsoft.com/office/drawing/2014/chart" uri="{C3380CC4-5D6E-409C-BE32-E72D297353CC}">
+              <c16:uniqueId val="{00000001-2F6B-4BE5-BAF6-FD3523F0F381}"/>
+            </c:ext>
+          </c:extLst>
         </c:ser>
         <c:dLbls>
-          <c:numFmt formatCode="#,##0" sourceLinked="0"/>
-          <c:txPr>
-            <a:bodyPr/>
-            <a:lstStyle/>
-            <a:p>
-              <a:pPr>
-                <a:defRPr b="0" i="0" strike="noStrike" sz="1200" u="none">
-                  <a:solidFill>
-                    <a:srgbClr val="000000"/>
-                  </a:solidFill>
-                  <a:latin typeface="Arial"/>
-                </a:defRPr>
-              </a:pPr>
-            </a:p>
-          </c:txPr>
           <c:showLegendKey val="0"/>
           <c:showVal val="0"/>
           <c:showCatName val="0"/>
           <c:showSerName val="0"/>
           <c:showPercent val="0"/>
           <c:showBubbleSize val="0"/>
-          <c:showLeaderLines val="0"/>
         </c:dLbls>
         <c:marker val="1"/>
+        <c:smooth val="0"/>
         <c:axId val="2094734554"/>
         <c:axId val="2094734552"/>
-        <c:axId val="2094734556"/>
       </c:lineChart>
       <c:catAx>
         <c:axId val="2094734554"/>
@@ -1270,7 +1124,7 @@
                   </a:defRPr>
                 </a:pPr>
                 <a:r>
-                  <a:rPr b="0" i="0" u="none" strike="noStrike">
+                  <a:rPr lang="en-US" b="0" i="0" u="none" strike="noStrike">
                     <a:solidFill>
                       <a:srgbClr val="94A3B8"/>
                     </a:solidFill>
@@ -1281,7 +1135,6 @@
               </a:p>
             </c:rich>
           </c:tx>
-          <c:layout/>
           <c:overlay val="0"/>
         </c:title>
         <c:numFmt formatCode="General" sourceLinked="1"/>
@@ -1316,6 +1169,7 @@
         <c:crosses val="autoZero"/>
         <c:auto val="1"/>
         <c:lblAlgn val="ctr"/>
+        <c:lblOffset val="100"/>
         <c:noMultiLvlLbl val="1"/>
       </c:catAx>
       <c:valAx>
@@ -1351,7 +1205,7 @@
                   </a:defRPr>
                 </a:pPr>
                 <a:r>
-                  <a:rPr b="0" i="0" u="none" strike="noStrike">
+                  <a:rPr lang="en-US" b="0" i="0" u="none" strike="noStrike">
                     <a:solidFill>
                       <a:srgbClr val="94A3B8"/>
                     </a:solidFill>
@@ -1362,7 +1216,6 @@
               </a:p>
             </c:rich>
           </c:tx>
-          <c:layout/>
           <c:overlay val="0"/>
         </c:title>
         <c:numFmt formatCode="General" sourceLinked="0"/>
@@ -1415,7 +1268,7 @@
         <a:lstStyle/>
         <a:p>
           <a:pPr>
-            <a:defRPr sz="1100">      </a:defRPr>
+            <a:defRPr sz="1100"/>
           </a:pPr>
           <a:endParaRPr lang="en-US"/>
         </a:p>
@@ -1423,6 +1276,7 @@
     </c:legend>
     <c:plotVisOnly val="1"/>
     <c:dispBlanksAs val="span"/>
+    <c:showDLblsOverMax val="1"/>
   </c:chart>
   <c:spPr>
     <a:solidFill>
@@ -1440,9 +1294,11 @@
 </file>
 
 <file path=ppt/charts/chart3.xml><?xml version="1.0" encoding="utf-8"?>
-<c:chartSpace xmlns:c="http://schemas.openxmlformats.org/drawingml/2006/chart" xmlns:a="http://schemas.openxmlformats.org/drawingml/2006/main" xmlns:r="http://schemas.openxmlformats.org/officeDocument/2006/relationships">
+<c:chartSpace xmlns:c="http://schemas.openxmlformats.org/drawingml/2006/chart" xmlns:a="http://schemas.openxmlformats.org/drawingml/2006/main" xmlns:r="http://schemas.openxmlformats.org/officeDocument/2006/relationships" xmlns:c16r2="http://schemas.microsoft.com/office/drawing/2015/06/chart">
   <c:date1904 val="0"/>
+  <c:lang val="en-US"/>
   <c:roundedCorners val="1"/>
+  <c:style val="2"/>
   <c:chart>
     <c:autoTitleDeleted val="1"/>
     <c:plotArea>
@@ -1472,69 +1328,43 @@
             <a:effectLst/>
           </c:spPr>
           <c:invertIfNegative val="0"/>
-          <c:dLbls>
-            <c:numFmt formatCode="#,##0" sourceLinked="0"/>
-            <c:txPr>
-              <a:bodyPr/>
-              <a:lstStyle/>
-              <a:p>
-                <a:pPr>
-                  <a:defRPr b="0" i="0" strike="noStrike" sz="1200" u="none">
-                    <a:solidFill>
-                      <a:srgbClr val="000000"/>
-                    </a:solidFill>
-                    <a:latin typeface="Arial"/>
-                  </a:defRPr>
-                </a:pPr>
-              </a:p>
-            </c:txPr>
-            <c:showLegendKey val="0"/>
-            <c:showVal val="0"/>
-            <c:showCatName val="0"/>
-            <c:showSerName val="0"/>
-            <c:showPercent val="0"/>
-            <c:showBubbleSize val="0"/>
-            <c:showLeaderLines val="0"/>
-          </c:dLbls>
           <c:cat>
-            <c:multiLvlStrRef>
+            <c:strRef>
               <c:f>Sheet1!$A$2:$A$11</c:f>
-              <c:multiLvlStrCache>
+              <c:strCache>
                 <c:ptCount val="10"/>
-                <c:lvl>
-                  <c:pt idx="0">
-                    <c:v>1</c:v>
-                  </c:pt>
-                  <c:pt idx="1">
-                    <c:v>2</c:v>
-                  </c:pt>
-                  <c:pt idx="2">
-                    <c:v>4</c:v>
-                  </c:pt>
-                  <c:pt idx="3">
-                    <c:v>6</c:v>
-                  </c:pt>
-                  <c:pt idx="4">
-                    <c:v>8</c:v>
-                  </c:pt>
-                  <c:pt idx="5">
-                    <c:v>10</c:v>
-                  </c:pt>
-                  <c:pt idx="6">
-                    <c:v>12</c:v>
-                  </c:pt>
-                  <c:pt idx="7">
-                    <c:v>16</c:v>
-                  </c:pt>
-                  <c:pt idx="8">
-                    <c:v>20</c:v>
-                  </c:pt>
-                  <c:pt idx="9">
-                    <c:v>24</c:v>
-                  </c:pt>
-                </c:lvl>
-              </c:multiLvlStrCache>
-            </c:multiLvlStrRef>
+                <c:pt idx="0">
+                  <c:v>1</c:v>
+                </c:pt>
+                <c:pt idx="1">
+                  <c:v>2</c:v>
+                </c:pt>
+                <c:pt idx="2">
+                  <c:v>4</c:v>
+                </c:pt>
+                <c:pt idx="3">
+                  <c:v>6</c:v>
+                </c:pt>
+                <c:pt idx="4">
+                  <c:v>8</c:v>
+                </c:pt>
+                <c:pt idx="5">
+                  <c:v>10</c:v>
+                </c:pt>
+                <c:pt idx="6">
+                  <c:v>12</c:v>
+                </c:pt>
+                <c:pt idx="7">
+                  <c:v>16</c:v>
+                </c:pt>
+                <c:pt idx="8">
+                  <c:v>20</c:v>
+                </c:pt>
+                <c:pt idx="9">
+                  <c:v>24</c:v>
+                </c:pt>
+              </c:strCache>
+            </c:strRef>
           </c:cat>
           <c:val>
             <c:numRef>
@@ -1543,22 +1373,22 @@
                 <c:formatCode>General</c:formatCode>
                 <c:ptCount val="10"/>
                 <c:pt idx="0">
-                  <c:v>1.0067</c:v>
+                  <c:v>1.0066999999999999</c:v>
                 </c:pt>
                 <c:pt idx="1">
-                  <c:v>0.5197</c:v>
+                  <c:v>0.51970000000000005</c:v>
                 </c:pt>
                 <c:pt idx="2">
-                  <c:v>0.2864</c:v>
+                  <c:v>0.28639999999999999</c:v>
                 </c:pt>
                 <c:pt idx="3">
-                  <c:v>0.2115</c:v>
+                  <c:v>0.21149999999999999</c:v>
                 </c:pt>
                 <c:pt idx="4">
-                  <c:v>0.1821</c:v>
+                  <c:v>0.18210000000000001</c:v>
                 </c:pt>
                 <c:pt idx="5">
-                  <c:v>0.1639</c:v>
+                  <c:v>0.16389999999999999</c:v>
                 </c:pt>
                 <c:pt idx="6">
                   <c:v>0.1555</c:v>
@@ -1567,44 +1397,31 @@
                   <c:v>0.1608</c:v>
                 </c:pt>
                 <c:pt idx="8">
-                  <c:v>0.1539</c:v>
+                  <c:v>0.15390000000000001</c:v>
                 </c:pt>
                 <c:pt idx="9">
-                  <c:v>0.1834</c:v>
+                  <c:v>0.18340000000000001</c:v>
                 </c:pt>
               </c:numCache>
             </c:numRef>
           </c:val>
+          <c:extLst>
+            <c:ext xmlns:c16="http://schemas.microsoft.com/office/drawing/2014/chart" uri="{C3380CC4-5D6E-409C-BE32-E72D297353CC}">
+              <c16:uniqueId val="{00000000-B0A8-4A58-A7AE-02FC356A5F41}"/>
+            </c:ext>
+          </c:extLst>
         </c:ser>
         <c:dLbls>
-          <c:numFmt formatCode="#,##0" sourceLinked="0"/>
-          <c:txPr>
-            <a:bodyPr/>
-            <a:lstStyle/>
-            <a:p>
-              <a:pPr>
-                <a:defRPr b="0" i="0" strike="noStrike" sz="1200" u="none">
-                  <a:solidFill>
-                    <a:srgbClr val="000000"/>
-                  </a:solidFill>
-                  <a:latin typeface="Arial"/>
-                </a:defRPr>
-              </a:pPr>
-            </a:p>
-          </c:txPr>
           <c:showLegendKey val="0"/>
           <c:showVal val="0"/>
           <c:showCatName val="0"/>
           <c:showSerName val="0"/>
           <c:showPercent val="0"/>
           <c:showBubbleSize val="0"/>
-          <c:showLeaderLines val="0"/>
         </c:dLbls>
         <c:gapWidth val="150"/>
-        <c:overlap val="0"/>
         <c:axId val="2094734554"/>
         <c:axId val="2094734552"/>
-        <c:axId val="2094734556"/>
       </c:barChart>
       <c:catAx>
         <c:axId val="2094734554"/>
@@ -1628,7 +1445,7 @@
                   </a:defRPr>
                 </a:pPr>
                 <a:r>
-                  <a:rPr b="0" i="0" u="none" strike="noStrike">
+                  <a:rPr lang="en-US" b="0" i="0" u="none" strike="noStrike">
                     <a:solidFill>
                       <a:srgbClr val="94A3B8"/>
                     </a:solidFill>
@@ -1639,7 +1456,6 @@
               </a:p>
             </c:rich>
           </c:tx>
-          <c:layout/>
           <c:overlay val="0"/>
         </c:title>
         <c:numFmt formatCode="General" sourceLinked="1"/>
@@ -1674,6 +1490,7 @@
         <c:crosses val="autoZero"/>
         <c:auto val="1"/>
         <c:lblAlgn val="ctr"/>
+        <c:lblOffset val="100"/>
         <c:noMultiLvlLbl val="1"/>
       </c:catAx>
       <c:valAx>
@@ -1709,7 +1526,7 @@
                   </a:defRPr>
                 </a:pPr>
                 <a:r>
-                  <a:rPr b="0" i="0" u="none" strike="noStrike">
+                  <a:rPr lang="en-US" b="0" i="0" u="none" strike="noStrike">
                     <a:solidFill>
                       <a:srgbClr val="94A3B8"/>
                     </a:solidFill>
@@ -1720,7 +1537,6 @@
               </a:p>
             </c:rich>
           </c:tx>
-          <c:layout/>
           <c:overlay val="0"/>
         </c:title>
         <c:numFmt formatCode="General" sourceLinked="0"/>
@@ -1767,6 +1583,7 @@
     </c:plotArea>
     <c:plotVisOnly val="1"/>
     <c:dispBlanksAs val="span"/>
+    <c:showDLblsOverMax val="1"/>
   </c:chart>
   <c:spPr>
     <a:solidFill>
@@ -1805,234 +1622,10 @@
           <a:chExt cx="0" cy="0"/>
         </a:xfrm>
       </p:grpSpPr>
-      <p:sp>
-        <p:nvSpPr>
-          <p:cNvPr id="2" name="Header Placeholder 1"/>
-          <p:cNvSpPr>
-            <a:spLocks noGrp="1"/>
-          </p:cNvSpPr>
-          <p:nvPr>
-            <p:ph type="hdr" sz="quarter"/>
-          </p:nvPr>
-        </p:nvSpPr>
-        <p:spPr>
-          <a:xfrm>
-            <a:off x="0" y="0"/>
-            <a:ext cx="2971800" cy="458788"/>
-          </a:xfrm>
-          <a:prstGeom prst="rect">
-            <a:avLst/>
-          </a:prstGeom>
-        </p:spPr>
-        <p:txBody>
-          <a:bodyPr vert="horz" lIns="91440" tIns="45720" rIns="91440" bIns="45720" rtlCol="0"/>
-          <a:lstStyle>
-            <a:lvl1pPr algn="l">
-              <a:defRPr sz="1200"/>
-            </a:lvl1pPr>
-          </a:lstStyle>
-          <a:p>
-            <a:endParaRPr lang="en-US"/>
-          </a:p>
-        </p:txBody>
-      </p:sp>
-      <p:sp>
-        <p:nvSpPr>
-          <p:cNvPr id="3" name="Date Placeholder 2"/>
-          <p:cNvSpPr>
-            <a:spLocks noGrp="1"/>
-          </p:cNvSpPr>
-          <p:nvPr>
-            <p:ph type="dt" idx="1"/>
-          </p:nvPr>
-        </p:nvSpPr>
-        <p:spPr>
-          <a:xfrm>
-            <a:off x="3884613" y="0"/>
-            <a:ext cx="2971800" cy="458788"/>
-          </a:xfrm>
-          <a:prstGeom prst="rect">
-            <a:avLst/>
-          </a:prstGeom>
-        </p:spPr>
-        <p:txBody>
-          <a:bodyPr vert="horz" lIns="91440" tIns="45720" rIns="91440" bIns="45720" rtlCol="0"/>
-          <a:lstStyle>
-            <a:lvl1pPr algn="r">
-              <a:defRPr sz="1200"/>
-            </a:lvl1pPr>
-          </a:lstStyle>
-          <a:p>
-            <a:fld id="{5282F153-3F37-0F45-9E97-73ACFA13230C}" type="datetimeFigureOut">
-              <a:rPr lang="en-US"/>
-              <a:t>7/23/19</a:t>
-            </a:fld>
-            <a:endParaRPr lang="en-US"/>
-          </a:p>
-        </p:txBody>
-      </p:sp>
-      <p:sp>
-        <p:nvSpPr>
-          <p:cNvPr id="4" name="Slide Image Placeholder 3"/>
-          <p:cNvSpPr>
-            <a:spLocks noGrp="1" noRot="1" noChangeAspect="1"/>
-          </p:cNvSpPr>
-          <p:nvPr>
-            <p:ph type="sldImg" idx="2"/>
-          </p:nvPr>
-        </p:nvSpPr>
-        <p:spPr>
-          <a:xfrm>
-            <a:off x="685800" y="1143000"/>
-            <a:ext cx="5486400" cy="3086100"/>
-          </a:xfrm>
-          <a:prstGeom prst="rect">
-            <a:avLst/>
-          </a:prstGeom>
-          <a:noFill/>
-          <a:ln w="12700">
-            <a:solidFill>
-              <a:prstClr val="black"/>
-            </a:solidFill>
-          </a:ln>
-        </p:spPr>
-        <p:txBody>
-          <a:bodyPr vert="horz" lIns="91440" tIns="45720" rIns="91440" bIns="45720" rtlCol="0" anchor="ctr"/>
-          <a:lstStyle/>
-          <a:p>
-            <a:endParaRPr lang="en-US"/>
-          </a:p>
-        </p:txBody>
-      </p:sp>
-      <p:sp>
-        <p:nvSpPr>
-          <p:cNvPr id="5" name="Notes Placeholder 4"/>
-          <p:cNvSpPr>
-            <a:spLocks noGrp="1"/>
-          </p:cNvSpPr>
-          <p:nvPr>
-            <p:ph type="body" sz="quarter" idx="3"/>
-          </p:nvPr>
-        </p:nvSpPr>
-        <p:spPr>
-          <a:xfrm>
-            <a:off x="685800" y="4400550"/>
-            <a:ext cx="5486400" cy="3600450"/>
-          </a:xfrm>
-          <a:prstGeom prst="rect">
-            <a:avLst/>
-          </a:prstGeom>
-        </p:spPr>
-        <p:txBody>
-          <a:bodyPr vert="horz" lIns="91440" tIns="45720" rIns="91440" bIns="45720" rtlCol="0"/>
-          <a:lstStyle/>
-          <a:p>
-            <a:pPr lvl="0"/>
-            <a:r>
-              <a:rPr lang="en-US"/>
-              <a:t>Click to edit Master text styles</a:t>
-            </a:r>
-          </a:p>
-          <a:p>
-            <a:pPr lvl="1"/>
-            <a:r>
-              <a:rPr lang="en-US"/>
-              <a:t>Second level</a:t>
-            </a:r>
-          </a:p>
-          <a:p>
-            <a:pPr lvl="2"/>
-            <a:r>
-              <a:rPr lang="en-US"/>
-              <a:t>Third level</a:t>
-            </a:r>
-          </a:p>
-          <a:p>
-            <a:pPr lvl="3"/>
-            <a:r>
-              <a:rPr lang="en-US"/>
-              <a:t>Fourth level</a:t>
-            </a:r>
-          </a:p>
-          <a:p>
-            <a:pPr lvl="4"/>
-            <a:r>
-              <a:rPr lang="en-US"/>
-              <a:t>Fifth level</a:t>
-            </a:r>
-          </a:p>
-        </p:txBody>
-      </p:sp>
-      <p:sp>
-        <p:nvSpPr>
-          <p:cNvPr id="6" name="Footer Placeholder 5"/>
-          <p:cNvSpPr>
-            <a:spLocks noGrp="1"/>
-          </p:cNvSpPr>
-          <p:nvPr>
-            <p:ph type="ftr" sz="quarter" idx="4"/>
-          </p:nvPr>
-        </p:nvSpPr>
-        <p:spPr>
-          <a:xfrm>
-            <a:off x="0" y="8685213"/>
-            <a:ext cx="2971800" cy="458787"/>
-          </a:xfrm>
-          <a:prstGeom prst="rect">
-            <a:avLst/>
-          </a:prstGeom>
-        </p:spPr>
-        <p:txBody>
-          <a:bodyPr vert="horz" lIns="91440" tIns="45720" rIns="91440" bIns="45720" rtlCol="0" anchor="b"/>
-          <a:lstStyle>
-            <a:lvl1pPr algn="l">
-              <a:defRPr sz="1200"/>
-            </a:lvl1pPr>
-          </a:lstStyle>
-          <a:p>
-            <a:endParaRPr lang="en-US"/>
-          </a:p>
-        </p:txBody>
-      </p:sp>
-      <p:sp>
-        <p:nvSpPr>
-          <p:cNvPr id="7" name="Slide Number Placeholder 6"/>
-          <p:cNvSpPr>
-            <a:spLocks noGrp="1"/>
-          </p:cNvSpPr>
-          <p:nvPr>
-            <p:ph type="sldNum" sz="quarter" idx="5"/>
-          </p:nvPr>
-        </p:nvSpPr>
-        <p:spPr>
-          <a:xfrm>
-            <a:off x="3884613" y="8685213"/>
-            <a:ext cx="2971800" cy="458787"/>
-          </a:xfrm>
-          <a:prstGeom prst="rect">
-            <a:avLst/>
-          </a:prstGeom>
-        </p:spPr>
-        <p:txBody>
-          <a:bodyPr vert="horz" lIns="91440" tIns="45720" rIns="91440" bIns="45720" rtlCol="0" anchor="b"/>
-          <a:lstStyle>
-            <a:lvl1pPr algn="r">
-              <a:defRPr sz="1200"/>
-            </a:lvl1pPr>
-          </a:lstStyle>
-          <a:p>
-            <a:fld id="{CE5E9CC1-C706-0F49-92D6-E571CC5EEA8F}" type="slidenum">
-              <a:rPr lang="en-US"/>
-              <a:t>‹#›</a:t>
-            </a:fld>
-            <a:endParaRPr lang="en-US"/>
-          </a:p>
-        </p:txBody>
-      </p:sp>
     </p:spTree>
     <p:extLst>
       <p:ext uri="{BB962C8B-B14F-4D97-AF65-F5344CB8AC3E}">
-        <p14:creationId xmlns:p14="http://schemas.microsoft.com/office/powerpoint/2010/main" val="1024086991"/>
+        <p14:creationId xmlns:p14="http://schemas.microsoft.com/office/powerpoint/2010/main" val="3157156388"/>
       </p:ext>
     </p:extLst>
   </p:cSld>
@@ -2176,10 +1769,6 @@
           <a:bodyPr/>
           <a:lstStyle/>
           <a:p>
-            <a:r>
-              <a:rPr lang="en-US" dirty="0"/>
-              <a:t/>
-            </a:r>
             <a:endParaRPr lang="en-US" dirty="0"/>
           </a:p>
         </p:txBody>
@@ -2264,10 +1853,6 @@
           <a:bodyPr/>
           <a:lstStyle/>
           <a:p>
-            <a:r>
-              <a:rPr lang="en-US" dirty="0"/>
-              <a:t/>
-            </a:r>
             <a:endParaRPr lang="en-US" dirty="0"/>
           </a:p>
         </p:txBody>
@@ -2352,10 +1937,6 @@
           <a:bodyPr/>
           <a:lstStyle/>
           <a:p>
-            <a:r>
-              <a:rPr lang="en-US" dirty="0"/>
-              <a:t/>
-            </a:r>
             <a:endParaRPr lang="en-US" dirty="0"/>
           </a:p>
         </p:txBody>
@@ -2440,10 +2021,6 @@
           <a:bodyPr/>
           <a:lstStyle/>
           <a:p>
-            <a:r>
-              <a:rPr lang="en-US" dirty="0"/>
-              <a:t/>
-            </a:r>
             <a:endParaRPr lang="en-US" dirty="0"/>
           </a:p>
         </p:txBody>
@@ -2528,10 +2105,6 @@
           <a:bodyPr/>
           <a:lstStyle/>
           <a:p>
-            <a:r>
-              <a:rPr lang="en-US" dirty="0"/>
-              <a:t/>
-            </a:r>
             <a:endParaRPr lang="en-US" dirty="0"/>
           </a:p>
         </p:txBody>
@@ -2616,10 +2189,6 @@
           <a:bodyPr/>
           <a:lstStyle/>
           <a:p>
-            <a:r>
-              <a:rPr lang="en-US" dirty="0"/>
-              <a:t/>
-            </a:r>
             <a:endParaRPr lang="en-US" dirty="0"/>
           </a:p>
         </p:txBody>
@@ -2704,10 +2273,6 @@
           <a:bodyPr/>
           <a:lstStyle/>
           <a:p>
-            <a:r>
-              <a:rPr lang="en-US" dirty="0"/>
-              <a:t/>
-            </a:r>
             <a:endParaRPr lang="en-US" dirty="0"/>
           </a:p>
         </p:txBody>
@@ -2792,10 +2357,6 @@
           <a:bodyPr/>
           <a:lstStyle/>
           <a:p>
-            <a:r>
-              <a:rPr lang="en-US" dirty="0"/>
-              <a:t/>
-            </a:r>
             <a:endParaRPr lang="en-US" dirty="0"/>
           </a:p>
         </p:txBody>
@@ -2869,6 +2430,11 @@
 <file path=ppt/slideMasters/slideMaster1.xml><?xml version="1.0" encoding="utf-8"?>
 <p:sldMaster xmlns:a="http://schemas.openxmlformats.org/drawingml/2006/main" xmlns:r="http://schemas.openxmlformats.org/officeDocument/2006/relationships" xmlns:p="http://schemas.openxmlformats.org/presentationml/2006/main">
   <p:cSld>
+    <p:bg>
+      <p:bgRef idx="1001">
+        <a:schemeClr val="bg1"/>
+      </p:bgRef>
+    </p:bg>
     <p:spTree>
       <p:nvGrpSpPr>
         <p:cNvPr id="1" name=""/>
@@ -3151,6 +2717,7 @@
         <a:solidFill>
           <a:srgbClr val="0A0F1E"/>
         </a:solidFill>
+        <a:effectLst/>
       </p:bgPr>
     </p:bg>
     <p:spTree>
@@ -3186,6 +2753,13 @@
           </a:solidFill>
           <a:ln/>
         </p:spPr>
+        <p:txBody>
+          <a:bodyPr/>
+          <a:lstStyle/>
+          <a:p>
+            <a:endParaRPr lang="en-US"/>
+          </a:p>
+        </p:txBody>
       </p:sp>
       <p:sp>
         <p:nvSpPr>
@@ -3206,6 +2780,13 @@
           </a:solidFill>
           <a:ln/>
         </p:spPr>
+        <p:txBody>
+          <a:bodyPr/>
+          <a:lstStyle/>
+          <a:p>
+            <a:endParaRPr lang="en-US"/>
+          </a:p>
+        </p:txBody>
       </p:sp>
       <p:sp>
         <p:nvSpPr>
@@ -3228,6 +2809,13 @@
           </a:solidFill>
           <a:ln/>
         </p:spPr>
+        <p:txBody>
+          <a:bodyPr/>
+          <a:lstStyle/>
+          <a:p>
+            <a:endParaRPr lang="en-US"/>
+          </a:p>
+        </p:txBody>
       </p:sp>
       <p:sp>
         <p:nvSpPr>
@@ -3250,24 +2838,31 @@
           </a:solidFill>
           <a:ln/>
         </p:spPr>
+        <p:txBody>
+          <a:bodyPr/>
+          <a:lstStyle/>
+          <a:p>
+            <a:endParaRPr lang="en-US"/>
+          </a:p>
+        </p:txBody>
       </p:sp>
       <p:pic>
         <p:nvPicPr>
-          <p:cNvPr id="6" name="Image 0" descr="preencoded.png">    </p:cNvPr>
+          <p:cNvPr id="6" name="Image 0" descr="preencoded.png"/>
           <p:cNvPicPr>
             <a:picLocks noChangeAspect="1"/>
           </p:cNvPicPr>
           <p:nvPr/>
         </p:nvPicPr>
         <p:blipFill>
-          <a:blip r:embed="rId1"/>
+          <a:blip r:embed="rId3"/>
           <a:stretch>
             <a:fillRect/>
           </a:stretch>
         </p:blipFill>
         <p:spPr>
           <a:xfrm>
-            <a:off x="1508760" y="914400"/>
+            <a:off x="1280160" y="1074420"/>
             <a:ext cx="914400" cy="914400"/>
           </a:xfrm>
           <a:prstGeom prst="rect">
@@ -3296,11 +2891,11 @@
           <a:bodyPr wrap="square" lIns="0" tIns="0" rIns="0" bIns="0" rtlCol="0" anchor="ctr"/>
           <a:lstStyle/>
           <a:p>
-            <a:pPr indent="0" marL="0">
+            <a:pPr marL="0" indent="0">
               <a:buNone/>
             </a:pPr>
             <a:r>
-              <a:rPr lang="en-US" sz="1000" b="1" spc="400" kern="0" dirty="0">
+              <a:rPr lang="en-US" sz="1000" b="1" kern="0" spc="400" dirty="0">
                 <a:solidFill>
                   <a:srgbClr val="06B6D4"/>
                 </a:solidFill>
@@ -3332,7 +2927,7 @@
           <a:bodyPr wrap="square" lIns="0" tIns="0" rIns="0" bIns="0" rtlCol="0" anchor="ctr"/>
           <a:lstStyle/>
           <a:p>
-            <a:pPr indent="0" marL="0">
+            <a:pPr marL="0" indent="0">
               <a:buNone/>
             </a:pPr>
             <a:r>
@@ -3343,9 +2938,6 @@
               </a:rPr>
               <a:t>O(N²)</a:t>
             </a:r>
-            <a:pPr indent="0" marL="0">
-              <a:buNone/>
-            </a:pPr>
             <a:r>
               <a:rPr lang="en-US" sz="1500" dirty="0">
                 <a:solidFill>
@@ -3379,7 +2971,7 @@
           <a:bodyPr wrap="square" lIns="0" tIns="0" rIns="0" bIns="0" rtlCol="0" anchor="ctr"/>
           <a:lstStyle/>
           <a:p>
-            <a:pPr indent="0" marL="0">
+            <a:pPr marL="0" indent="0">
               <a:buNone/>
             </a:pPr>
             <a:r>
@@ -3415,7 +3007,7 @@
           <a:bodyPr wrap="square" lIns="0" tIns="0" rIns="0" bIns="0" rtlCol="0" anchor="ctr"/>
           <a:lstStyle/>
           <a:p>
-            <a:pPr indent="0" marL="0">
+            <a:pPr marL="0" indent="0">
               <a:lnSpc>
                 <a:spcPct val="115000"/>
               </a:lnSpc>
@@ -3432,7 +3024,7 @@
             <a:endParaRPr lang="en-US" sz="3600" dirty="0"/>
           </a:p>
           <a:p>
-            <a:pPr indent="0" marL="0">
+            <a:pPr marL="0" indent="0">
               <a:lnSpc>
                 <a:spcPct val="115000"/>
               </a:lnSpc>
@@ -3449,7 +3041,7 @@
             <a:endParaRPr lang="en-US" sz="3600" dirty="0"/>
           </a:p>
           <a:p>
-            <a:pPr indent="0" marL="0">
+            <a:pPr marL="0" indent="0">
               <a:lnSpc>
                 <a:spcPct val="115000"/>
               </a:lnSpc>
@@ -3486,6 +3078,13 @@
           </a:solidFill>
           <a:ln/>
         </p:spPr>
+        <p:txBody>
+          <a:bodyPr/>
+          <a:lstStyle/>
+          <a:p>
+            <a:endParaRPr lang="en-US"/>
+          </a:p>
+        </p:txBody>
       </p:sp>
       <p:sp>
         <p:nvSpPr>
@@ -3508,7 +3107,7 @@
           <a:bodyPr wrap="square" lIns="0" tIns="0" rIns="0" bIns="0" rtlCol="0" anchor="ctr"/>
           <a:lstStyle/>
           <a:p>
-            <a:pPr indent="0" marL="0">
+            <a:pPr marL="0" indent="0">
               <a:buNone/>
             </a:pPr>
             <a:r>
@@ -3544,7 +3143,7 @@
           <a:bodyPr wrap="square" lIns="0" tIns="0" rIns="0" bIns="0" rtlCol="0" anchor="ctr"/>
           <a:lstStyle/>
           <a:p>
-            <a:pPr indent="0" marL="0">
+            <a:pPr marL="0" indent="0">
               <a:lnSpc>
                 <a:spcPct val="130000"/>
               </a:lnSpc>
@@ -3561,7 +3160,7 @@
             <a:endParaRPr lang="en-US" sz="1200" dirty="0"/>
           </a:p>
           <a:p>
-            <a:pPr indent="0" marL="0">
+            <a:pPr marL="0" indent="0">
               <a:lnSpc>
                 <a:spcPct val="130000"/>
               </a:lnSpc>
@@ -3600,7 +3199,7 @@
           <a:bodyPr wrap="square" lIns="0" tIns="0" rIns="0" bIns="0" rtlCol="0" anchor="ctr"/>
           <a:lstStyle/>
           <a:p>
-            <a:pPr indent="0" marL="0">
+            <a:pPr marL="0" indent="0">
               <a:buNone/>
             </a:pPr>
             <a:r>
@@ -3631,6 +3230,7 @@
         <a:solidFill>
           <a:srgbClr val="0A0F1E"/>
         </a:solidFill>
+        <a:effectLst/>
       </p:bgPr>
     </p:bg>
     <p:spTree>
@@ -3668,11 +3268,11 @@
           <a:bodyPr wrap="square" lIns="0" tIns="0" rIns="0" bIns="0" rtlCol="0" anchor="ctr"/>
           <a:lstStyle/>
           <a:p>
-            <a:pPr indent="0" marL="0">
+            <a:pPr marL="0" indent="0">
               <a:buNone/>
             </a:pPr>
             <a:r>
-              <a:rPr lang="en-US" sz="1000" b="1" spc="500" kern="0" dirty="0">
+              <a:rPr lang="en-US" sz="1000" b="1" kern="0" spc="500" dirty="0">
                 <a:solidFill>
                   <a:srgbClr val="06B6D4"/>
                 </a:solidFill>
@@ -3704,7 +3304,7 @@
           <a:bodyPr wrap="square" lIns="0" tIns="0" rIns="0" bIns="0" rtlCol="0" anchor="ctr"/>
           <a:lstStyle/>
           <a:p>
-            <a:pPr indent="0" marL="0">
+            <a:pPr marL="0" indent="0">
               <a:buNone/>
             </a:pPr>
             <a:r>
@@ -3738,13 +3338,20 @@
           </a:solidFill>
           <a:ln/>
           <a:effectLst>
-            <a:outerShdw sx="100000" sy="100000" kx="0" ky="0" algn="bl" rotWithShape="0" blurRad="152400" dist="50800" dir="8100000">
+            <a:outerShdw blurRad="152400" dist="50800" dir="8100000" algn="bl" rotWithShape="0">
               <a:srgbClr val="000000">
                 <a:alpha val="40000"/>
               </a:srgbClr>
             </a:outerShdw>
           </a:effectLst>
         </p:spPr>
+        <p:txBody>
+          <a:bodyPr/>
+          <a:lstStyle/>
+          <a:p>
+            <a:endParaRPr lang="en-US"/>
+          </a:p>
+        </p:txBody>
       </p:sp>
       <p:sp>
         <p:nvSpPr>
@@ -3765,17 +3372,24 @@
           </a:solidFill>
           <a:ln/>
         </p:spPr>
+        <p:txBody>
+          <a:bodyPr/>
+          <a:lstStyle/>
+          <a:p>
+            <a:endParaRPr lang="en-US"/>
+          </a:p>
+        </p:txBody>
       </p:sp>
       <p:pic>
         <p:nvPicPr>
-          <p:cNvPr id="6" name="Image 0" descr="preencoded.png">    </p:cNvPr>
+          <p:cNvPr id="6" name="Image 0" descr="preencoded.png"/>
           <p:cNvPicPr>
             <a:picLocks noChangeAspect="1"/>
           </p:cNvPicPr>
           <p:nvPr/>
         </p:nvPicPr>
         <p:blipFill>
-          <a:blip r:embed="rId1"/>
+          <a:blip r:embed="rId3"/>
           <a:stretch>
             <a:fillRect/>
           </a:stretch>
@@ -3811,7 +3425,7 @@
           <a:bodyPr wrap="square" lIns="0" tIns="0" rIns="0" bIns="0" rtlCol="0" anchor="ctr"/>
           <a:lstStyle/>
           <a:p>
-            <a:pPr indent="0" marL="0">
+            <a:pPr marL="0" indent="0">
               <a:buNone/>
             </a:pPr>
             <a:r>
@@ -3847,7 +3461,7 @@
           <a:bodyPr wrap="square" lIns="0" tIns="0" rIns="0" bIns="0" rtlCol="0" anchor="ctr"/>
           <a:lstStyle/>
           <a:p>
-            <a:pPr indent="0" marL="0">
+            <a:pPr marL="0" indent="0">
               <a:lnSpc>
                 <a:spcPct val="140000"/>
               </a:lnSpc>
@@ -3884,13 +3498,20 @@
           </a:solidFill>
           <a:ln/>
           <a:effectLst>
-            <a:outerShdw sx="100000" sy="100000" kx="0" ky="0" algn="bl" rotWithShape="0" blurRad="152400" dist="50800" dir="8100000">
+            <a:outerShdw blurRad="152400" dist="50800" dir="8100000" algn="bl" rotWithShape="0">
               <a:srgbClr val="000000">
                 <a:alpha val="40000"/>
               </a:srgbClr>
             </a:outerShdw>
           </a:effectLst>
         </p:spPr>
+        <p:txBody>
+          <a:bodyPr/>
+          <a:lstStyle/>
+          <a:p>
+            <a:endParaRPr lang="en-US"/>
+          </a:p>
+        </p:txBody>
       </p:sp>
       <p:sp>
         <p:nvSpPr>
@@ -3911,17 +3532,24 @@
           </a:solidFill>
           <a:ln/>
         </p:spPr>
+        <p:txBody>
+          <a:bodyPr/>
+          <a:lstStyle/>
+          <a:p>
+            <a:endParaRPr lang="en-US"/>
+          </a:p>
+        </p:txBody>
       </p:sp>
       <p:pic>
         <p:nvPicPr>
-          <p:cNvPr id="11" name="Image 1" descr="preencoded.png">    </p:cNvPr>
+          <p:cNvPr id="11" name="Image 1" descr="preencoded.png"/>
           <p:cNvPicPr>
             <a:picLocks noChangeAspect="1"/>
           </p:cNvPicPr>
           <p:nvPr/>
         </p:nvPicPr>
         <p:blipFill>
-          <a:blip r:embed="rId2"/>
+          <a:blip r:embed="rId4"/>
           <a:stretch>
             <a:fillRect/>
           </a:stretch>
@@ -3957,7 +3585,7 @@
           <a:bodyPr wrap="square" lIns="0" tIns="0" rIns="0" bIns="0" rtlCol="0" anchor="ctr"/>
           <a:lstStyle/>
           <a:p>
-            <a:pPr indent="0" marL="0">
+            <a:pPr marL="0" indent="0">
               <a:buNone/>
             </a:pPr>
             <a:r>
@@ -3993,7 +3621,7 @@
           <a:bodyPr wrap="square" lIns="0" tIns="0" rIns="0" bIns="0" rtlCol="0" anchor="ctr"/>
           <a:lstStyle/>
           <a:p>
-            <a:pPr indent="0" marL="0">
+            <a:pPr marL="0" indent="0">
               <a:lnSpc>
                 <a:spcPct val="140000"/>
               </a:lnSpc>
@@ -4020,7 +3648,7 @@
         <p:spPr>
           <a:xfrm>
             <a:off x="6309360" y="1371600"/>
-            <a:ext cx="2834640" cy="3337560"/>
+            <a:ext cx="2560320" cy="3337560"/>
           </a:xfrm>
           <a:prstGeom prst="rect">
             <a:avLst/>
@@ -4030,13 +3658,20 @@
           </a:solidFill>
           <a:ln/>
           <a:effectLst>
-            <a:outerShdw sx="100000" sy="100000" kx="0" ky="0" algn="bl" rotWithShape="0" blurRad="152400" dist="50800" dir="8100000">
+            <a:outerShdw blurRad="152400" dist="50800" dir="8100000" algn="bl" rotWithShape="0">
               <a:srgbClr val="000000">
                 <a:alpha val="40000"/>
               </a:srgbClr>
             </a:outerShdw>
           </a:effectLst>
         </p:spPr>
+        <p:txBody>
+          <a:bodyPr/>
+          <a:lstStyle/>
+          <a:p>
+            <a:endParaRPr lang="en-US"/>
+          </a:p>
+        </p:txBody>
       </p:sp>
       <p:sp>
         <p:nvSpPr>
@@ -4047,7 +3682,7 @@
         <p:spPr>
           <a:xfrm>
             <a:off x="6309360" y="1371600"/>
-            <a:ext cx="2834640" cy="64008"/>
+            <a:ext cx="2560320" cy="64008"/>
           </a:xfrm>
           <a:prstGeom prst="rect">
             <a:avLst/>
@@ -4057,17 +3692,24 @@
           </a:solidFill>
           <a:ln/>
         </p:spPr>
+        <p:txBody>
+          <a:bodyPr/>
+          <a:lstStyle/>
+          <a:p>
+            <a:endParaRPr lang="en-US"/>
+          </a:p>
+        </p:txBody>
       </p:sp>
       <p:pic>
         <p:nvPicPr>
-          <p:cNvPr id="16" name="Image 2" descr="preencoded.png">    </p:cNvPr>
+          <p:cNvPr id="16" name="Image 2" descr="preencoded.png"/>
           <p:cNvPicPr>
             <a:picLocks noChangeAspect="1"/>
           </p:cNvPicPr>
           <p:nvPr/>
         </p:nvPicPr>
         <p:blipFill>
-          <a:blip r:embed="rId3"/>
+          <a:blip r:embed="rId5"/>
           <a:stretch>
             <a:fillRect/>
           </a:stretch>
@@ -4103,7 +3745,7 @@
           <a:bodyPr wrap="square" lIns="0" tIns="0" rIns="0" bIns="0" rtlCol="0" anchor="ctr"/>
           <a:lstStyle/>
           <a:p>
-            <a:pPr indent="0" marL="0">
+            <a:pPr marL="0" indent="0">
               <a:buNone/>
             </a:pPr>
             <a:r>
@@ -4127,7 +3769,7 @@
         <p:spPr>
           <a:xfrm>
             <a:off x="6492240" y="2148840"/>
-            <a:ext cx="2468880" cy="2423160"/>
+            <a:ext cx="2194560" cy="2423160"/>
           </a:xfrm>
           <a:prstGeom prst="rect">
             <a:avLst/>
@@ -4139,7 +3781,7 @@
           <a:bodyPr wrap="square" lIns="0" tIns="0" rIns="0" bIns="0" rtlCol="0" anchor="ctr"/>
           <a:lstStyle/>
           <a:p>
-            <a:pPr indent="0" marL="0">
+            <a:pPr marL="0" indent="0">
               <a:lnSpc>
                 <a:spcPct val="140000"/>
               </a:lnSpc>
@@ -4176,6 +3818,13 @@
           </a:solidFill>
           <a:ln/>
         </p:spPr>
+        <p:txBody>
+          <a:bodyPr/>
+          <a:lstStyle/>
+          <a:p>
+            <a:endParaRPr lang="en-US"/>
+          </a:p>
+        </p:txBody>
       </p:sp>
       <p:sp>
         <p:nvSpPr>
@@ -4198,7 +3847,7 @@
           <a:bodyPr wrap="square" lIns="0" tIns="0" rIns="0" bIns="0" rtlCol="0" anchor="ctr"/>
           <a:lstStyle/>
           <a:p>
-            <a:pPr algn="ctr" indent="0" marL="0">
+            <a:pPr marL="0" indent="0" algn="ctr">
               <a:buNone/>
             </a:pPr>
             <a:r>
@@ -4229,6 +3878,7 @@
         <a:solidFill>
           <a:srgbClr val="0A0F1E"/>
         </a:solidFill>
+        <a:effectLst/>
       </p:bgPr>
     </p:bg>
     <p:spTree>
@@ -4266,11 +3916,11 @@
           <a:bodyPr wrap="square" lIns="0" tIns="0" rIns="0" bIns="0" rtlCol="0" anchor="ctr"/>
           <a:lstStyle/>
           <a:p>
-            <a:pPr indent="0" marL="0">
+            <a:pPr marL="0" indent="0">
               <a:buNone/>
             </a:pPr>
             <a:r>
-              <a:rPr lang="en-US" sz="1000" b="1" spc="500" kern="0" dirty="0">
+              <a:rPr lang="en-US" sz="1000" b="1" kern="0" spc="500" dirty="0">
                 <a:solidFill>
                   <a:srgbClr val="06B6D4"/>
                 </a:solidFill>
@@ -4302,7 +3952,7 @@
           <a:bodyPr wrap="square" lIns="0" tIns="0" rIns="0" bIns="0" rtlCol="0" anchor="ctr"/>
           <a:lstStyle/>
           <a:p>
-            <a:pPr indent="0" marL="0">
+            <a:pPr marL="0" indent="0">
               <a:buNone/>
             </a:pPr>
             <a:r>
@@ -4336,6 +3986,13 @@
           </a:solidFill>
           <a:ln/>
         </p:spPr>
+        <p:txBody>
+          <a:bodyPr/>
+          <a:lstStyle/>
+          <a:p>
+            <a:endParaRPr lang="en-US"/>
+          </a:p>
+        </p:txBody>
       </p:sp>
       <p:sp>
         <p:nvSpPr>
@@ -4356,17 +4013,24 @@
           </a:solidFill>
           <a:ln/>
         </p:spPr>
+        <p:txBody>
+          <a:bodyPr/>
+          <a:lstStyle/>
+          <a:p>
+            <a:endParaRPr lang="en-US"/>
+          </a:p>
+        </p:txBody>
       </p:sp>
       <p:pic>
         <p:nvPicPr>
-          <p:cNvPr id="6" name="Image 0" descr="preencoded.png">    </p:cNvPr>
+          <p:cNvPr id="6" name="Image 0" descr="preencoded.png"/>
           <p:cNvPicPr>
             <a:picLocks noChangeAspect="1"/>
           </p:cNvPicPr>
           <p:nvPr/>
         </p:nvPicPr>
         <p:blipFill>
-          <a:blip r:embed="rId1"/>
+          <a:blip r:embed="rId3"/>
           <a:stretch>
             <a:fillRect/>
           </a:stretch>
@@ -4402,7 +4066,7 @@
           <a:bodyPr wrap="square" lIns="0" tIns="0" rIns="0" bIns="0" rtlCol="0" anchor="ctr"/>
           <a:lstStyle/>
           <a:p>
-            <a:pPr indent="0" marL="0">
+            <a:pPr marL="0" indent="0">
               <a:buNone/>
             </a:pPr>
             <a:r>
@@ -4436,6 +4100,13 @@
           </a:solidFill>
           <a:ln/>
         </p:spPr>
+        <p:txBody>
+          <a:bodyPr/>
+          <a:lstStyle/>
+          <a:p>
+            <a:endParaRPr lang="en-US"/>
+          </a:p>
+        </p:txBody>
       </p:sp>
       <p:sp>
         <p:nvSpPr>
@@ -4456,6 +4127,13 @@
           </a:solidFill>
           <a:ln/>
         </p:spPr>
+        <p:txBody>
+          <a:bodyPr/>
+          <a:lstStyle/>
+          <a:p>
+            <a:endParaRPr lang="en-US"/>
+          </a:p>
+        </p:txBody>
       </p:sp>
       <p:sp>
         <p:nvSpPr>
@@ -4476,17 +4154,24 @@
           </a:solidFill>
           <a:ln/>
         </p:spPr>
+        <p:txBody>
+          <a:bodyPr/>
+          <a:lstStyle/>
+          <a:p>
+            <a:endParaRPr lang="en-US"/>
+          </a:p>
+        </p:txBody>
       </p:sp>
       <p:pic>
         <p:nvPicPr>
-          <p:cNvPr id="11" name="Image 1" descr="preencoded.png">    </p:cNvPr>
+          <p:cNvPr id="11" name="Image 1" descr="preencoded.png"/>
           <p:cNvPicPr>
             <a:picLocks noChangeAspect="1"/>
           </p:cNvPicPr>
           <p:nvPr/>
         </p:nvPicPr>
         <p:blipFill>
-          <a:blip r:embed="rId2"/>
+          <a:blip r:embed="rId4"/>
           <a:stretch>
             <a:fillRect/>
           </a:stretch>
@@ -4522,7 +4207,7 @@
           <a:bodyPr wrap="square" lIns="0" tIns="0" rIns="0" bIns="0" rtlCol="0" anchor="ctr"/>
           <a:lstStyle/>
           <a:p>
-            <a:pPr indent="0" marL="0">
+            <a:pPr marL="0" indent="0">
               <a:buNone/>
             </a:pPr>
             <a:r>
@@ -4556,6 +4241,13 @@
           </a:solidFill>
           <a:ln/>
         </p:spPr>
+        <p:txBody>
+          <a:bodyPr/>
+          <a:lstStyle/>
+          <a:p>
+            <a:endParaRPr lang="en-US"/>
+          </a:p>
+        </p:txBody>
       </p:sp>
       <p:sp>
         <p:nvSpPr>
@@ -4576,6 +4268,13 @@
           </a:solidFill>
           <a:ln/>
         </p:spPr>
+        <p:txBody>
+          <a:bodyPr/>
+          <a:lstStyle/>
+          <a:p>
+            <a:endParaRPr lang="en-US"/>
+          </a:p>
+        </p:txBody>
       </p:sp>
       <p:sp>
         <p:nvSpPr>
@@ -4596,17 +4295,24 @@
           </a:solidFill>
           <a:ln/>
         </p:spPr>
+        <p:txBody>
+          <a:bodyPr/>
+          <a:lstStyle/>
+          <a:p>
+            <a:endParaRPr lang="en-US"/>
+          </a:p>
+        </p:txBody>
       </p:sp>
       <p:pic>
         <p:nvPicPr>
-          <p:cNvPr id="16" name="Image 2" descr="preencoded.png">    </p:cNvPr>
+          <p:cNvPr id="16" name="Image 2" descr="preencoded.png"/>
           <p:cNvPicPr>
             <a:picLocks noChangeAspect="1"/>
           </p:cNvPicPr>
           <p:nvPr/>
         </p:nvPicPr>
         <p:blipFill>
-          <a:blip r:embed="rId3"/>
+          <a:blip r:embed="rId5"/>
           <a:stretch>
             <a:fillRect/>
           </a:stretch>
@@ -4642,7 +4348,7 @@
           <a:bodyPr wrap="square" lIns="0" tIns="0" rIns="0" bIns="0" rtlCol="0" anchor="ctr"/>
           <a:lstStyle/>
           <a:p>
-            <a:pPr indent="0" marL="0">
+            <a:pPr marL="0" indent="0">
               <a:buNone/>
             </a:pPr>
             <a:r>
@@ -4676,6 +4382,13 @@
           </a:solidFill>
           <a:ln/>
         </p:spPr>
+        <p:txBody>
+          <a:bodyPr/>
+          <a:lstStyle/>
+          <a:p>
+            <a:endParaRPr lang="en-US"/>
+          </a:p>
+        </p:txBody>
       </p:sp>
       <p:sp>
         <p:nvSpPr>
@@ -4696,6 +4409,13 @@
           </a:solidFill>
           <a:ln/>
         </p:spPr>
+        <p:txBody>
+          <a:bodyPr/>
+          <a:lstStyle/>
+          <a:p>
+            <a:endParaRPr lang="en-US"/>
+          </a:p>
+        </p:txBody>
       </p:sp>
       <p:sp>
         <p:nvSpPr>
@@ -4716,17 +4436,24 @@
           </a:solidFill>
           <a:ln/>
         </p:spPr>
+        <p:txBody>
+          <a:bodyPr/>
+          <a:lstStyle/>
+          <a:p>
+            <a:endParaRPr lang="en-US"/>
+          </a:p>
+        </p:txBody>
       </p:sp>
       <p:pic>
         <p:nvPicPr>
-          <p:cNvPr id="21" name="Image 3" descr="preencoded.png">    </p:cNvPr>
+          <p:cNvPr id="21" name="Image 3" descr="preencoded.png"/>
           <p:cNvPicPr>
             <a:picLocks noChangeAspect="1"/>
           </p:cNvPicPr>
           <p:nvPr/>
         </p:nvPicPr>
         <p:blipFill>
-          <a:blip r:embed="rId4"/>
+          <a:blip r:embed="rId6"/>
           <a:stretch>
             <a:fillRect/>
           </a:stretch>
@@ -4762,7 +4489,7 @@
           <a:bodyPr wrap="square" lIns="0" tIns="0" rIns="0" bIns="0" rtlCol="0" anchor="ctr"/>
           <a:lstStyle/>
           <a:p>
-            <a:pPr indent="0" marL="0">
+            <a:pPr marL="0" indent="0">
               <a:buNone/>
             </a:pPr>
             <a:r>
@@ -4796,6 +4523,13 @@
           </a:solidFill>
           <a:ln/>
         </p:spPr>
+        <p:txBody>
+          <a:bodyPr/>
+          <a:lstStyle/>
+          <a:p>
+            <a:endParaRPr lang="en-US"/>
+          </a:p>
+        </p:txBody>
       </p:sp>
       <p:sp>
         <p:nvSpPr>
@@ -4816,6 +4550,13 @@
           </a:solidFill>
           <a:ln/>
         </p:spPr>
+        <p:txBody>
+          <a:bodyPr/>
+          <a:lstStyle/>
+          <a:p>
+            <a:endParaRPr lang="en-US"/>
+          </a:p>
+        </p:txBody>
       </p:sp>
       <p:sp>
         <p:nvSpPr>
@@ -4836,17 +4577,24 @@
           </a:solidFill>
           <a:ln/>
         </p:spPr>
+        <p:txBody>
+          <a:bodyPr/>
+          <a:lstStyle/>
+          <a:p>
+            <a:endParaRPr lang="en-US"/>
+          </a:p>
+        </p:txBody>
       </p:sp>
       <p:pic>
         <p:nvPicPr>
-          <p:cNvPr id="26" name="Image 4" descr="preencoded.png">    </p:cNvPr>
+          <p:cNvPr id="26" name="Image 4" descr="preencoded.png"/>
           <p:cNvPicPr>
             <a:picLocks noChangeAspect="1"/>
           </p:cNvPicPr>
           <p:nvPr/>
         </p:nvPicPr>
         <p:blipFill>
-          <a:blip r:embed="rId5"/>
+          <a:blip r:embed="rId7"/>
           <a:stretch>
             <a:fillRect/>
           </a:stretch>
@@ -4882,7 +4630,7 @@
           <a:bodyPr wrap="square" lIns="0" tIns="0" rIns="0" bIns="0" rtlCol="0" anchor="ctr"/>
           <a:lstStyle/>
           <a:p>
-            <a:pPr indent="0" marL="0">
+            <a:pPr marL="0" indent="0">
               <a:buNone/>
             </a:pPr>
             <a:r>
@@ -4916,6 +4664,13 @@
           </a:solidFill>
           <a:ln/>
         </p:spPr>
+        <p:txBody>
+          <a:bodyPr/>
+          <a:lstStyle/>
+          <a:p>
+            <a:endParaRPr lang="en-US"/>
+          </a:p>
+        </p:txBody>
       </p:sp>
       <p:sp>
         <p:nvSpPr>
@@ -4936,6 +4691,13 @@
           </a:solidFill>
           <a:ln/>
         </p:spPr>
+        <p:txBody>
+          <a:bodyPr/>
+          <a:lstStyle/>
+          <a:p>
+            <a:endParaRPr lang="en-US"/>
+          </a:p>
+        </p:txBody>
       </p:sp>
       <p:sp>
         <p:nvSpPr>
@@ -4956,17 +4718,24 @@
           </a:solidFill>
           <a:ln/>
         </p:spPr>
+        <p:txBody>
+          <a:bodyPr/>
+          <a:lstStyle/>
+          <a:p>
+            <a:endParaRPr lang="en-US"/>
+          </a:p>
+        </p:txBody>
       </p:sp>
       <p:pic>
         <p:nvPicPr>
-          <p:cNvPr id="31" name="Image 5" descr="preencoded.png">    </p:cNvPr>
+          <p:cNvPr id="31" name="Image 5" descr="preencoded.png"/>
           <p:cNvPicPr>
             <a:picLocks noChangeAspect="1"/>
           </p:cNvPicPr>
           <p:nvPr/>
         </p:nvPicPr>
         <p:blipFill>
-          <a:blip r:embed="rId6"/>
+          <a:blip r:embed="rId5"/>
           <a:stretch>
             <a:fillRect/>
           </a:stretch>
@@ -5002,7 +4771,7 @@
           <a:bodyPr wrap="square" lIns="0" tIns="0" rIns="0" bIns="0" rtlCol="0" anchor="ctr"/>
           <a:lstStyle/>
           <a:p>
-            <a:pPr indent="0" marL="0">
+            <a:pPr marL="0" indent="0">
               <a:buNone/>
             </a:pPr>
             <a:r>
@@ -5036,13 +4805,20 @@
           </a:solidFill>
           <a:ln/>
           <a:effectLst>
-            <a:outerShdw sx="100000" sy="100000" kx="0" ky="0" algn="bl" rotWithShape="0" blurRad="127000" dist="38100" dir="8100000">
+            <a:outerShdw blurRad="127000" dist="38100" dir="8100000" algn="bl" rotWithShape="0">
               <a:srgbClr val="000000">
                 <a:alpha val="35000"/>
               </a:srgbClr>
             </a:outerShdw>
           </a:effectLst>
         </p:spPr>
+        <p:txBody>
+          <a:bodyPr/>
+          <a:lstStyle/>
+          <a:p>
+            <a:endParaRPr lang="en-US"/>
+          </a:p>
+        </p:txBody>
       </p:sp>
       <p:sp>
         <p:nvSpPr>
@@ -5063,6 +4839,13 @@
           </a:solidFill>
           <a:ln/>
         </p:spPr>
+        <p:txBody>
+          <a:bodyPr/>
+          <a:lstStyle/>
+          <a:p>
+            <a:endParaRPr lang="en-US"/>
+          </a:p>
+        </p:txBody>
       </p:sp>
       <p:sp>
         <p:nvSpPr>
@@ -5085,7 +4868,7 @@
           <a:bodyPr wrap="square" lIns="0" tIns="0" rIns="0" bIns="0" rtlCol="0" anchor="ctr"/>
           <a:lstStyle/>
           <a:p>
-            <a:pPr algn="ctr" indent="0" marL="0">
+            <a:pPr marL="0" indent="0" algn="ctr">
               <a:buNone/>
             </a:pPr>
             <a:r>
@@ -5121,7 +4904,7 @@
           <a:bodyPr wrap="square" lIns="0" tIns="0" rIns="0" bIns="0" rtlCol="0" anchor="ctr"/>
           <a:lstStyle/>
           <a:p>
-            <a:pPr algn="ctr" indent="0" marL="0">
+            <a:pPr marL="0" indent="0" algn="ctr">
               <a:buNone/>
             </a:pPr>
             <a:r>
@@ -5157,7 +4940,7 @@
           <a:bodyPr wrap="square" lIns="0" tIns="0" rIns="0" bIns="0" rtlCol="0" anchor="ctr"/>
           <a:lstStyle/>
           <a:p>
-            <a:pPr algn="ctr" indent="0" marL="0">
+            <a:pPr marL="0" indent="0" algn="ctr">
               <a:buNone/>
             </a:pPr>
             <a:r>
@@ -5191,13 +4974,20 @@
           </a:solidFill>
           <a:ln/>
           <a:effectLst>
-            <a:outerShdw sx="100000" sy="100000" kx="0" ky="0" algn="bl" rotWithShape="0" blurRad="127000" dist="38100" dir="8100000">
+            <a:outerShdw blurRad="127000" dist="38100" dir="8100000" algn="bl" rotWithShape="0">
               <a:srgbClr val="000000">
                 <a:alpha val="35000"/>
               </a:srgbClr>
             </a:outerShdw>
           </a:effectLst>
         </p:spPr>
+        <p:txBody>
+          <a:bodyPr/>
+          <a:lstStyle/>
+          <a:p>
+            <a:endParaRPr lang="en-US"/>
+          </a:p>
+        </p:txBody>
       </p:sp>
       <p:sp>
         <p:nvSpPr>
@@ -5218,6 +5008,13 @@
           </a:solidFill>
           <a:ln/>
         </p:spPr>
+        <p:txBody>
+          <a:bodyPr/>
+          <a:lstStyle/>
+          <a:p>
+            <a:endParaRPr lang="en-US"/>
+          </a:p>
+        </p:txBody>
       </p:sp>
       <p:sp>
         <p:nvSpPr>
@@ -5240,7 +5037,7 @@
           <a:bodyPr wrap="square" lIns="0" tIns="0" rIns="0" bIns="0" rtlCol="0" anchor="ctr"/>
           <a:lstStyle/>
           <a:p>
-            <a:pPr algn="ctr" indent="0" marL="0">
+            <a:pPr marL="0" indent="0" algn="ctr">
               <a:buNone/>
             </a:pPr>
             <a:r>
@@ -5276,7 +5073,7 @@
           <a:bodyPr wrap="square" lIns="0" tIns="0" rIns="0" bIns="0" rtlCol="0" anchor="ctr"/>
           <a:lstStyle/>
           <a:p>
-            <a:pPr algn="ctr" indent="0" marL="0">
+            <a:pPr marL="0" indent="0" algn="ctr">
               <a:buNone/>
             </a:pPr>
             <a:r>
@@ -5312,7 +5109,7 @@
           <a:bodyPr wrap="square" lIns="0" tIns="0" rIns="0" bIns="0" rtlCol="0" anchor="ctr"/>
           <a:lstStyle/>
           <a:p>
-            <a:pPr algn="ctr" indent="0" marL="0">
+            <a:pPr marL="0" indent="0" algn="ctr">
               <a:buNone/>
             </a:pPr>
             <a:r>
@@ -5346,13 +5143,20 @@
           </a:solidFill>
           <a:ln/>
           <a:effectLst>
-            <a:outerShdw sx="100000" sy="100000" kx="0" ky="0" algn="bl" rotWithShape="0" blurRad="127000" dist="38100" dir="8100000">
+            <a:outerShdw blurRad="127000" dist="38100" dir="8100000" algn="bl" rotWithShape="0">
               <a:srgbClr val="000000">
                 <a:alpha val="35000"/>
               </a:srgbClr>
             </a:outerShdw>
           </a:effectLst>
         </p:spPr>
+        <p:txBody>
+          <a:bodyPr/>
+          <a:lstStyle/>
+          <a:p>
+            <a:endParaRPr lang="en-US"/>
+          </a:p>
+        </p:txBody>
       </p:sp>
       <p:sp>
         <p:nvSpPr>
@@ -5373,6 +5177,13 @@
           </a:solidFill>
           <a:ln/>
         </p:spPr>
+        <p:txBody>
+          <a:bodyPr/>
+          <a:lstStyle/>
+          <a:p>
+            <a:endParaRPr lang="en-US"/>
+          </a:p>
+        </p:txBody>
       </p:sp>
       <p:sp>
         <p:nvSpPr>
@@ -5395,7 +5206,7 @@
           <a:bodyPr wrap="square" lIns="0" tIns="0" rIns="0" bIns="0" rtlCol="0" anchor="ctr"/>
           <a:lstStyle/>
           <a:p>
-            <a:pPr algn="ctr" indent="0" marL="0">
+            <a:pPr marL="0" indent="0" algn="ctr">
               <a:buNone/>
             </a:pPr>
             <a:r>
@@ -5431,7 +5242,7 @@
           <a:bodyPr wrap="square" lIns="0" tIns="0" rIns="0" bIns="0" rtlCol="0" anchor="ctr"/>
           <a:lstStyle/>
           <a:p>
-            <a:pPr algn="ctr" indent="0" marL="0">
+            <a:pPr marL="0" indent="0" algn="ctr">
               <a:buNone/>
             </a:pPr>
             <a:r>
@@ -5467,7 +5278,7 @@
           <a:bodyPr wrap="square" lIns="0" tIns="0" rIns="0" bIns="0" rtlCol="0" anchor="ctr"/>
           <a:lstStyle/>
           <a:p>
-            <a:pPr algn="ctr" indent="0" marL="0">
+            <a:pPr marL="0" indent="0" algn="ctr">
               <a:buNone/>
             </a:pPr>
             <a:r>
@@ -5501,13 +5312,20 @@
           </a:solidFill>
           <a:ln/>
           <a:effectLst>
-            <a:outerShdw sx="100000" sy="100000" kx="0" ky="0" algn="bl" rotWithShape="0" blurRad="127000" dist="38100" dir="8100000">
+            <a:outerShdw blurRad="127000" dist="38100" dir="8100000" algn="bl" rotWithShape="0">
               <a:srgbClr val="000000">
                 <a:alpha val="35000"/>
               </a:srgbClr>
             </a:outerShdw>
           </a:effectLst>
         </p:spPr>
+        <p:txBody>
+          <a:bodyPr/>
+          <a:lstStyle/>
+          <a:p>
+            <a:endParaRPr lang="en-US"/>
+          </a:p>
+        </p:txBody>
       </p:sp>
       <p:sp>
         <p:nvSpPr>
@@ -5528,6 +5346,13 @@
           </a:solidFill>
           <a:ln/>
         </p:spPr>
+        <p:txBody>
+          <a:bodyPr/>
+          <a:lstStyle/>
+          <a:p>
+            <a:endParaRPr lang="en-US"/>
+          </a:p>
+        </p:txBody>
       </p:sp>
       <p:sp>
         <p:nvSpPr>
@@ -5550,7 +5375,7 @@
           <a:bodyPr wrap="square" lIns="0" tIns="0" rIns="0" bIns="0" rtlCol="0" anchor="ctr"/>
           <a:lstStyle/>
           <a:p>
-            <a:pPr algn="ctr" indent="0" marL="0">
+            <a:pPr marL="0" indent="0" algn="ctr">
               <a:buNone/>
             </a:pPr>
             <a:r>
@@ -5586,7 +5411,7 @@
           <a:bodyPr wrap="square" lIns="0" tIns="0" rIns="0" bIns="0" rtlCol="0" anchor="ctr"/>
           <a:lstStyle/>
           <a:p>
-            <a:pPr algn="ctr" indent="0" marL="0">
+            <a:pPr marL="0" indent="0" algn="ctr">
               <a:buNone/>
             </a:pPr>
             <a:r>
@@ -5622,7 +5447,7 @@
           <a:bodyPr wrap="square" lIns="0" tIns="0" rIns="0" bIns="0" rtlCol="0" anchor="ctr"/>
           <a:lstStyle/>
           <a:p>
-            <a:pPr algn="ctr" indent="0" marL="0">
+            <a:pPr marL="0" indent="0" algn="ctr">
               <a:buNone/>
             </a:pPr>
             <a:r>
@@ -5645,8 +5470,8 @@
         </p:nvSpPr>
         <p:spPr>
           <a:xfrm>
-            <a:off x="4480560" y="4160520"/>
-            <a:ext cx="4480560" cy="777240"/>
+            <a:off x="4572000" y="4160520"/>
+            <a:ext cx="4343400" cy="777240"/>
           </a:xfrm>
           <a:prstGeom prst="rect">
             <a:avLst/>
@@ -5656,6 +5481,13 @@
           </a:solidFill>
           <a:ln/>
         </p:spPr>
+        <p:txBody>
+          <a:bodyPr/>
+          <a:lstStyle/>
+          <a:p>
+            <a:endParaRPr lang="en-US"/>
+          </a:p>
+        </p:txBody>
       </p:sp>
       <p:sp>
         <p:nvSpPr>
@@ -5665,8 +5497,8 @@
         </p:nvSpPr>
         <p:spPr>
           <a:xfrm>
-            <a:off x="4480560" y="4160520"/>
-            <a:ext cx="54864" cy="777240"/>
+            <a:off x="4572000" y="4157254"/>
+            <a:ext cx="45719" cy="777240"/>
           </a:xfrm>
           <a:prstGeom prst="rect">
             <a:avLst/>
@@ -5676,6 +5508,13 @@
           </a:solidFill>
           <a:ln/>
         </p:spPr>
+        <p:txBody>
+          <a:bodyPr/>
+          <a:lstStyle/>
+          <a:p>
+            <a:endParaRPr lang="en-US"/>
+          </a:p>
+        </p:txBody>
       </p:sp>
       <p:sp>
         <p:nvSpPr>
@@ -5698,7 +5537,7 @@
           <a:bodyPr wrap="square" lIns="0" tIns="0" rIns="0" bIns="0" rtlCol="0" anchor="ctr"/>
           <a:lstStyle/>
           <a:p>
-            <a:pPr indent="0" marL="0">
+            <a:pPr marL="0" indent="0">
               <a:lnSpc>
                 <a:spcPct val="130000"/>
               </a:lnSpc>
@@ -5732,6 +5571,7 @@
         <a:solidFill>
           <a:srgbClr val="0A0F1E"/>
         </a:solidFill>
+        <a:effectLst/>
       </p:bgPr>
     </p:bg>
     <p:spTree>
@@ -5769,11 +5609,11 @@
           <a:bodyPr wrap="square" lIns="0" tIns="0" rIns="0" bIns="0" rtlCol="0" anchor="ctr"/>
           <a:lstStyle/>
           <a:p>
-            <a:pPr indent="0" marL="0">
+            <a:pPr marL="0" indent="0">
               <a:buNone/>
             </a:pPr>
             <a:r>
-              <a:rPr lang="en-US" sz="1000" b="1" spc="500" kern="0" dirty="0">
+              <a:rPr lang="en-US" sz="1000" b="1" kern="0" spc="500" dirty="0">
                 <a:solidFill>
                   <a:srgbClr val="06B6D4"/>
                 </a:solidFill>
@@ -5805,7 +5645,7 @@
           <a:bodyPr wrap="square" lIns="0" tIns="0" rIns="0" bIns="0" rtlCol="0" anchor="ctr"/>
           <a:lstStyle/>
           <a:p>
-            <a:pPr indent="0" marL="0">
+            <a:pPr marL="0" indent="0">
               <a:buNone/>
             </a:pPr>
             <a:r>
@@ -5822,7 +5662,7 @@
       </p:sp>
       <p:graphicFrame>
         <p:nvGraphicFramePr>
-          <p:cNvPr id="4" name="Chart 0" descr=""/>
+          <p:cNvPr id="4" name="Chart 0"/>
           <p:cNvGraphicFramePr/>
           <p:nvPr/>
         </p:nvGraphicFramePr>
@@ -5830,9 +5670,9 @@
           <a:off x="274320" y="1005840"/>
           <a:ext cx="5394960" cy="3931920"/>
         </p:xfrm>
-        <a:graphic xmlns:a="http://schemas.openxmlformats.org/drawingml/2006/main">
+        <a:graphic>
           <a:graphicData uri="http://schemas.openxmlformats.org/drawingml/2006/chart">
-            <c:chart xmlns:c="http://schemas.openxmlformats.org/drawingml/2006/chart" r:id="rId1"/>
+            <c:chart xmlns:c="http://schemas.openxmlformats.org/drawingml/2006/chart" xmlns:r="http://schemas.openxmlformats.org/officeDocument/2006/relationships" r:id="rId3"/>
           </a:graphicData>
         </a:graphic>
       </p:graphicFrame>
@@ -5855,13 +5695,20 @@
           </a:solidFill>
           <a:ln/>
           <a:effectLst>
-            <a:outerShdw sx="100000" sy="100000" kx="0" ky="0" algn="bl" rotWithShape="0" blurRad="101600" dist="25400" dir="8100000">
+            <a:outerShdw blurRad="101600" dist="25400" dir="8100000" algn="bl" rotWithShape="0">
               <a:srgbClr val="000000">
                 <a:alpha val="30000"/>
               </a:srgbClr>
             </a:outerShdw>
           </a:effectLst>
         </p:spPr>
+        <p:txBody>
+          <a:bodyPr/>
+          <a:lstStyle/>
+          <a:p>
+            <a:endParaRPr lang="en-US"/>
+          </a:p>
+        </p:txBody>
       </p:sp>
       <p:sp>
         <p:nvSpPr>
@@ -5882,6 +5729,13 @@
           </a:solidFill>
           <a:ln/>
         </p:spPr>
+        <p:txBody>
+          <a:bodyPr/>
+          <a:lstStyle/>
+          <a:p>
+            <a:endParaRPr lang="en-US"/>
+          </a:p>
+        </p:txBody>
       </p:sp>
       <p:sp>
         <p:nvSpPr>
@@ -5904,7 +5758,7 @@
           <a:bodyPr wrap="square" lIns="0" tIns="0" rIns="0" bIns="0" rtlCol="0" anchor="ctr"/>
           <a:lstStyle/>
           <a:p>
-            <a:pPr indent="0" marL="0">
+            <a:pPr marL="0" indent="0">
               <a:buNone/>
             </a:pPr>
             <a:r>
@@ -5940,7 +5794,7 @@
           <a:bodyPr wrap="square" lIns="0" tIns="0" rIns="0" bIns="0" rtlCol="0" anchor="ctr"/>
           <a:lstStyle/>
           <a:p>
-            <a:pPr indent="0" marL="0">
+            <a:pPr marL="0" indent="0">
               <a:lnSpc>
                 <a:spcPct val="130000"/>
               </a:lnSpc>
@@ -5957,7 +5811,7 @@
             <a:endParaRPr lang="en-US" sz="1100" dirty="0"/>
           </a:p>
           <a:p>
-            <a:pPr indent="0" marL="0">
+            <a:pPr marL="0" indent="0">
               <a:lnSpc>
                 <a:spcPct val="130000"/>
               </a:lnSpc>
@@ -5994,13 +5848,20 @@
           </a:solidFill>
           <a:ln/>
           <a:effectLst>
-            <a:outerShdw sx="100000" sy="100000" kx="0" ky="0" algn="bl" rotWithShape="0" blurRad="101600" dist="25400" dir="8100000">
+            <a:outerShdw blurRad="101600" dist="25400" dir="8100000" algn="bl" rotWithShape="0">
               <a:srgbClr val="000000">
                 <a:alpha val="30000"/>
               </a:srgbClr>
             </a:outerShdw>
           </a:effectLst>
         </p:spPr>
+        <p:txBody>
+          <a:bodyPr/>
+          <a:lstStyle/>
+          <a:p>
+            <a:endParaRPr lang="en-US"/>
+          </a:p>
+        </p:txBody>
       </p:sp>
       <p:sp>
         <p:nvSpPr>
@@ -6021,6 +5882,13 @@
           </a:solidFill>
           <a:ln/>
         </p:spPr>
+        <p:txBody>
+          <a:bodyPr/>
+          <a:lstStyle/>
+          <a:p>
+            <a:endParaRPr lang="en-US"/>
+          </a:p>
+        </p:txBody>
       </p:sp>
       <p:sp>
         <p:nvSpPr>
@@ -6043,7 +5911,7 @@
           <a:bodyPr wrap="square" lIns="0" tIns="0" rIns="0" bIns="0" rtlCol="0" anchor="ctr"/>
           <a:lstStyle/>
           <a:p>
-            <a:pPr indent="0" marL="0">
+            <a:pPr marL="0" indent="0">
               <a:buNone/>
             </a:pPr>
             <a:r>
@@ -6079,7 +5947,7 @@
           <a:bodyPr wrap="square" lIns="0" tIns="0" rIns="0" bIns="0" rtlCol="0" anchor="ctr"/>
           <a:lstStyle/>
           <a:p>
-            <a:pPr indent="0" marL="0">
+            <a:pPr marL="0" indent="0">
               <a:lnSpc>
                 <a:spcPct val="130000"/>
               </a:lnSpc>
@@ -6096,7 +5964,7 @@
             <a:endParaRPr lang="en-US" sz="1100" dirty="0"/>
           </a:p>
           <a:p>
-            <a:pPr indent="0" marL="0">
+            <a:pPr marL="0" indent="0">
               <a:lnSpc>
                 <a:spcPct val="130000"/>
               </a:lnSpc>
@@ -6133,13 +6001,20 @@
           </a:solidFill>
           <a:ln/>
           <a:effectLst>
-            <a:outerShdw sx="100000" sy="100000" kx="0" ky="0" algn="bl" rotWithShape="0" blurRad="101600" dist="25400" dir="8100000">
+            <a:outerShdw blurRad="101600" dist="25400" dir="8100000" algn="bl" rotWithShape="0">
               <a:srgbClr val="000000">
                 <a:alpha val="30000"/>
               </a:srgbClr>
             </a:outerShdw>
           </a:effectLst>
         </p:spPr>
+        <p:txBody>
+          <a:bodyPr/>
+          <a:lstStyle/>
+          <a:p>
+            <a:endParaRPr lang="en-US"/>
+          </a:p>
+        </p:txBody>
       </p:sp>
       <p:sp>
         <p:nvSpPr>
@@ -6160,6 +6035,13 @@
           </a:solidFill>
           <a:ln/>
         </p:spPr>
+        <p:txBody>
+          <a:bodyPr/>
+          <a:lstStyle/>
+          <a:p>
+            <a:endParaRPr lang="en-US"/>
+          </a:p>
+        </p:txBody>
       </p:sp>
       <p:sp>
         <p:nvSpPr>
@@ -6182,7 +6064,7 @@
           <a:bodyPr wrap="square" lIns="0" tIns="0" rIns="0" bIns="0" rtlCol="0" anchor="ctr"/>
           <a:lstStyle/>
           <a:p>
-            <a:pPr indent="0" marL="0">
+            <a:pPr marL="0" indent="0">
               <a:buNone/>
             </a:pPr>
             <a:r>
@@ -6218,7 +6100,7 @@
           <a:bodyPr wrap="square" lIns="0" tIns="0" rIns="0" bIns="0" rtlCol="0" anchor="ctr"/>
           <a:lstStyle/>
           <a:p>
-            <a:pPr indent="0" marL="0">
+            <a:pPr marL="0" indent="0">
               <a:lnSpc>
                 <a:spcPct val="130000"/>
               </a:lnSpc>
@@ -6235,7 +6117,7 @@
             <a:endParaRPr lang="en-US" sz="1100" dirty="0"/>
           </a:p>
           <a:p>
-            <a:pPr indent="0" marL="0">
+            <a:pPr marL="0" indent="0">
               <a:lnSpc>
                 <a:spcPct val="130000"/>
               </a:lnSpc>
@@ -6272,6 +6154,13 @@
           </a:solidFill>
           <a:ln/>
         </p:spPr>
+        <p:txBody>
+          <a:bodyPr/>
+          <a:lstStyle/>
+          <a:p>
+            <a:endParaRPr lang="en-US"/>
+          </a:p>
+        </p:txBody>
       </p:sp>
       <p:sp>
         <p:nvSpPr>
@@ -6294,7 +6183,7 @@
           <a:bodyPr wrap="square" lIns="0" tIns="0" rIns="0" bIns="0" rtlCol="0" anchor="ctr"/>
           <a:lstStyle/>
           <a:p>
-            <a:pPr algn="ctr" indent="0" marL="0">
+            <a:pPr marL="0" indent="0" algn="ctr">
               <a:buNone/>
             </a:pPr>
             <a:r>
@@ -6325,6 +6214,7 @@
         <a:solidFill>
           <a:srgbClr val="0A0F1E"/>
         </a:solidFill>
+        <a:effectLst/>
       </p:bgPr>
     </p:bg>
     <p:spTree>
@@ -6362,11 +6252,11 @@
           <a:bodyPr wrap="square" lIns="0" tIns="0" rIns="0" bIns="0" rtlCol="0" anchor="ctr"/>
           <a:lstStyle/>
           <a:p>
-            <a:pPr indent="0" marL="0">
+            <a:pPr marL="0" indent="0">
               <a:buNone/>
             </a:pPr>
             <a:r>
-              <a:rPr lang="en-US" sz="1000" b="1" spc="500" kern="0" dirty="0">
+              <a:rPr lang="en-US" sz="1000" b="1" kern="0" spc="500" dirty="0">
                 <a:solidFill>
                   <a:srgbClr val="8B5CF6"/>
                 </a:solidFill>
@@ -6398,7 +6288,7 @@
           <a:bodyPr wrap="square" lIns="0" tIns="0" rIns="0" bIns="0" rtlCol="0" anchor="ctr"/>
           <a:lstStyle/>
           <a:p>
-            <a:pPr indent="0" marL="0">
+            <a:pPr marL="0" indent="0">
               <a:buNone/>
             </a:pPr>
             <a:r>
@@ -6415,7 +6305,7 @@
       </p:sp>
       <p:graphicFrame>
         <p:nvGraphicFramePr>
-          <p:cNvPr id="4" name="Chart 0" descr=""/>
+          <p:cNvPr id="4" name="Chart 0"/>
           <p:cNvGraphicFramePr/>
           <p:nvPr/>
         </p:nvGraphicFramePr>
@@ -6423,9 +6313,9 @@
           <a:off x="274320" y="1005840"/>
           <a:ext cx="5486400" cy="3794760"/>
         </p:xfrm>
-        <a:graphic xmlns:a="http://schemas.openxmlformats.org/drawingml/2006/main">
+        <a:graphic>
           <a:graphicData uri="http://schemas.openxmlformats.org/drawingml/2006/chart">
-            <c:chart xmlns:c="http://schemas.openxmlformats.org/drawingml/2006/chart" r:id="rId1"/>
+            <c:chart xmlns:c="http://schemas.openxmlformats.org/drawingml/2006/chart" xmlns:r="http://schemas.openxmlformats.org/officeDocument/2006/relationships" r:id="rId3"/>
           </a:graphicData>
         </a:graphic>
       </p:graphicFrame>
@@ -6448,13 +6338,20 @@
           </a:solidFill>
           <a:ln/>
           <a:effectLst>
-            <a:outerShdw sx="100000" sy="100000" kx="0" ky="0" algn="bl" rotWithShape="0" blurRad="101600" dist="25400" dir="8100000">
+            <a:outerShdw blurRad="101600" dist="25400" dir="8100000" algn="bl" rotWithShape="0">
               <a:srgbClr val="000000">
                 <a:alpha val="30000"/>
               </a:srgbClr>
             </a:outerShdw>
           </a:effectLst>
         </p:spPr>
+        <p:txBody>
+          <a:bodyPr/>
+          <a:lstStyle/>
+          <a:p>
+            <a:endParaRPr lang="en-US"/>
+          </a:p>
+        </p:txBody>
       </p:sp>
       <p:sp>
         <p:nvSpPr>
@@ -6475,6 +6372,13 @@
           </a:solidFill>
           <a:ln/>
         </p:spPr>
+        <p:txBody>
+          <a:bodyPr/>
+          <a:lstStyle/>
+          <a:p>
+            <a:endParaRPr lang="en-US"/>
+          </a:p>
+        </p:txBody>
       </p:sp>
       <p:sp>
         <p:nvSpPr>
@@ -6497,7 +6401,7 @@
           <a:bodyPr wrap="square" lIns="0" tIns="0" rIns="0" bIns="0" rtlCol="0" anchor="ctr"/>
           <a:lstStyle/>
           <a:p>
-            <a:pPr indent="0" marL="0">
+            <a:pPr marL="0" indent="0">
               <a:buNone/>
             </a:pPr>
             <a:r>
@@ -6533,7 +6437,7 @@
           <a:bodyPr wrap="square" lIns="0" tIns="0" rIns="0" bIns="0" rtlCol="0" anchor="ctr"/>
           <a:lstStyle/>
           <a:p>
-            <a:pPr indent="0" marL="0">
+            <a:pPr marL="0" indent="0">
               <a:lnSpc>
                 <a:spcPct val="130000"/>
               </a:lnSpc>
@@ -6570,13 +6474,20 @@
           </a:solidFill>
           <a:ln/>
           <a:effectLst>
-            <a:outerShdw sx="100000" sy="100000" kx="0" ky="0" algn="bl" rotWithShape="0" blurRad="101600" dist="25400" dir="8100000">
+            <a:outerShdw blurRad="101600" dist="25400" dir="8100000" algn="bl" rotWithShape="0">
               <a:srgbClr val="000000">
                 <a:alpha val="30000"/>
               </a:srgbClr>
             </a:outerShdw>
           </a:effectLst>
         </p:spPr>
+        <p:txBody>
+          <a:bodyPr/>
+          <a:lstStyle/>
+          <a:p>
+            <a:endParaRPr lang="en-US"/>
+          </a:p>
+        </p:txBody>
       </p:sp>
       <p:sp>
         <p:nvSpPr>
@@ -6597,6 +6508,13 @@
           </a:solidFill>
           <a:ln/>
         </p:spPr>
+        <p:txBody>
+          <a:bodyPr/>
+          <a:lstStyle/>
+          <a:p>
+            <a:endParaRPr lang="en-US"/>
+          </a:p>
+        </p:txBody>
       </p:sp>
       <p:sp>
         <p:nvSpPr>
@@ -6619,7 +6537,7 @@
           <a:bodyPr wrap="square" lIns="0" tIns="0" rIns="0" bIns="0" rtlCol="0" anchor="ctr"/>
           <a:lstStyle/>
           <a:p>
-            <a:pPr indent="0" marL="0">
+            <a:pPr marL="0" indent="0">
               <a:buNone/>
             </a:pPr>
             <a:r>
@@ -6655,7 +6573,7 @@
           <a:bodyPr wrap="square" lIns="0" tIns="0" rIns="0" bIns="0" rtlCol="0" anchor="ctr"/>
           <a:lstStyle/>
           <a:p>
-            <a:pPr indent="0" marL="0">
+            <a:pPr marL="0" indent="0">
               <a:lnSpc>
                 <a:spcPct val="130000"/>
               </a:lnSpc>
@@ -6692,13 +6610,20 @@
           </a:solidFill>
           <a:ln/>
           <a:effectLst>
-            <a:outerShdw sx="100000" sy="100000" kx="0" ky="0" algn="bl" rotWithShape="0" blurRad="101600" dist="25400" dir="8100000">
+            <a:outerShdw blurRad="101600" dist="25400" dir="8100000" algn="bl" rotWithShape="0">
               <a:srgbClr val="000000">
                 <a:alpha val="30000"/>
               </a:srgbClr>
             </a:outerShdw>
           </a:effectLst>
         </p:spPr>
+        <p:txBody>
+          <a:bodyPr/>
+          <a:lstStyle/>
+          <a:p>
+            <a:endParaRPr lang="en-US"/>
+          </a:p>
+        </p:txBody>
       </p:sp>
       <p:sp>
         <p:nvSpPr>
@@ -6719,6 +6644,13 @@
           </a:solidFill>
           <a:ln/>
         </p:spPr>
+        <p:txBody>
+          <a:bodyPr/>
+          <a:lstStyle/>
+          <a:p>
+            <a:endParaRPr lang="en-US"/>
+          </a:p>
+        </p:txBody>
       </p:sp>
       <p:sp>
         <p:nvSpPr>
@@ -6741,7 +6673,7 @@
           <a:bodyPr wrap="square" lIns="0" tIns="0" rIns="0" bIns="0" rtlCol="0" anchor="ctr"/>
           <a:lstStyle/>
           <a:p>
-            <a:pPr indent="0" marL="0">
+            <a:pPr marL="0" indent="0">
               <a:buNone/>
             </a:pPr>
             <a:r>
@@ -6777,7 +6709,7 @@
           <a:bodyPr wrap="square" lIns="0" tIns="0" rIns="0" bIns="0" rtlCol="0" anchor="ctr"/>
           <a:lstStyle/>
           <a:p>
-            <a:pPr indent="0" marL="0">
+            <a:pPr marL="0" indent="0">
               <a:lnSpc>
                 <a:spcPct val="130000"/>
               </a:lnSpc>
@@ -6811,6 +6743,7 @@
         <a:solidFill>
           <a:srgbClr val="0A0F1E"/>
         </a:solidFill>
+        <a:effectLst/>
       </p:bgPr>
     </p:bg>
     <p:spTree>
@@ -6848,11 +6781,11 @@
           <a:bodyPr wrap="square" lIns="0" tIns="0" rIns="0" bIns="0" rtlCol="0" anchor="ctr"/>
           <a:lstStyle/>
           <a:p>
-            <a:pPr indent="0" marL="0">
+            <a:pPr marL="0" indent="0">
               <a:buNone/>
             </a:pPr>
             <a:r>
-              <a:rPr lang="en-US" sz="1000" b="1" spc="500" kern="0" dirty="0">
+              <a:rPr lang="en-US" sz="1000" b="1" kern="0" spc="500" dirty="0">
                 <a:solidFill>
                   <a:srgbClr val="10B981"/>
                 </a:solidFill>
@@ -6884,7 +6817,7 @@
           <a:bodyPr wrap="square" lIns="0" tIns="0" rIns="0" bIns="0" rtlCol="0" anchor="ctr"/>
           <a:lstStyle/>
           <a:p>
-            <a:pPr indent="0" marL="0">
+            <a:pPr marL="0" indent="0">
               <a:buNone/>
             </a:pPr>
             <a:r>
@@ -6908,7 +6841,7 @@
         <p:spPr>
           <a:xfrm>
             <a:off x="274320" y="1188720"/>
-            <a:ext cx="3931920" cy="3383280"/>
+            <a:ext cx="3931920" cy="2423160"/>
           </a:xfrm>
           <a:prstGeom prst="rect">
             <a:avLst/>
@@ -6918,6 +6851,13 @@
           </a:solidFill>
           <a:ln/>
         </p:spPr>
+        <p:txBody>
+          <a:bodyPr/>
+          <a:lstStyle/>
+          <a:p>
+            <a:endParaRPr lang="en-US"/>
+          </a:p>
+        </p:txBody>
       </p:sp>
       <p:sp>
         <p:nvSpPr>
@@ -6938,6 +6878,13 @@
           </a:solidFill>
           <a:ln/>
         </p:spPr>
+        <p:txBody>
+          <a:bodyPr/>
+          <a:lstStyle/>
+          <a:p>
+            <a:endParaRPr lang="en-US"/>
+          </a:p>
+        </p:txBody>
       </p:sp>
       <p:sp>
         <p:nvSpPr>
@@ -6960,7 +6907,7 @@
           <a:bodyPr wrap="square" lIns="0" tIns="0" rIns="0" bIns="0" rtlCol="0" anchor="ctr"/>
           <a:lstStyle/>
           <a:p>
-            <a:pPr algn="ctr" indent="0" marL="0">
+            <a:pPr marL="0" indent="0" algn="ctr">
               <a:buNone/>
             </a:pPr>
             <a:r>
@@ -6984,23 +6931,41 @@
           <p:nvPr>
             <p:extLst>
               <p:ext uri="{D42A27DB-BD31-4B8C-83A1-F6EECF244321}">
-                <p14:modId xmlns:p14="http://schemas.microsoft.com/office/powerpoint/2010/main" val="1579011935"/>
+                <p14:modId xmlns:p14="http://schemas.microsoft.com/office/powerpoint/2010/main" val="872167069"/>
               </p:ext>
             </p:extLst>
           </p:nvPr>
         </p:nvGraphicFramePr>
         <p:xfrm>
-          <a:off x="320040" y="1600200"/>
-          <a:ext cx="3840480" cy="2468880"/>
+          <a:off x="274320" y="1600200"/>
+          <a:ext cx="3931920" cy="2011680"/>
         </p:xfrm>
         <a:graphic>
           <a:graphicData uri="http://schemas.openxmlformats.org/drawingml/2006/table">
             <a:tbl>
               <a:tblPr/>
               <a:tblGrid>
-                <a:gridCol w="1280160"/>
-                <a:gridCol w="1280160"/>
-                <a:gridCol w="1280160"/>
+                <a:gridCol w="1310640">
+                  <a:extLst>
+                    <a:ext uri="{9D8B030D-6E8A-4147-A177-3AD203B41FA5}">
+                      <a16:colId xmlns:a16="http://schemas.microsoft.com/office/drawing/2014/main" val="20000"/>
+                    </a:ext>
+                  </a:extLst>
+                </a:gridCol>
+                <a:gridCol w="1310640">
+                  <a:extLst>
+                    <a:ext uri="{9D8B030D-6E8A-4147-A177-3AD203B41FA5}">
+                      <a16:colId xmlns:a16="http://schemas.microsoft.com/office/drawing/2014/main" val="20001"/>
+                    </a:ext>
+                  </a:extLst>
+                </a:gridCol>
+                <a:gridCol w="1310640">
+                  <a:extLst>
+                    <a:ext uri="{9D8B030D-6E8A-4147-A177-3AD203B41FA5}">
+                      <a16:colId xmlns:a16="http://schemas.microsoft.com/office/drawing/2014/main" val="20002"/>
+                    </a:ext>
+                  </a:extLst>
+                </a:gridCol>
               </a:tblGrid>
               <a:tr h="502920">
                 <a:tc>
@@ -7008,7 +6973,7 @@
                     <a:bodyPr/>
                     <a:lstStyle/>
                     <a:p>
-                      <a:pPr algn="l" indent="0" marL="0">
+                      <a:pPr marL="0" indent="0" algn="l">
                         <a:buNone/>
                       </a:pPr>
                       <a:r>
@@ -7022,7 +6987,7 @@
                       <a:endParaRPr lang="en-US" sz="1200" dirty="0"/>
                     </a:p>
                   </a:txBody>
-                  <a:tcPr marL="91440" marR="91440" marT="45720" marB="45720" anchor="ctr">
+                  <a:tcPr anchor="ctr">
                     <a:lnL w="6350" cap="flat" cmpd="sng" algn="ctr">
                       <a:solidFill>
                         <a:srgbClr val="1E293B"/>
@@ -7069,7 +7034,7 @@
                     <a:bodyPr/>
                     <a:lstStyle/>
                     <a:p>
-                      <a:pPr algn="ctr" indent="0" marL="0">
+                      <a:pPr marL="0" indent="0" algn="ctr">
                         <a:buNone/>
                       </a:pPr>
                       <a:r>
@@ -7083,7 +7048,7 @@
                       <a:endParaRPr lang="en-US" sz="1200" dirty="0"/>
                     </a:p>
                   </a:txBody>
-                  <a:tcPr marL="91440" marR="91440" marT="45720" marB="45720" anchor="ctr">
+                  <a:tcPr anchor="ctr">
                     <a:lnL w="6350" cap="flat" cmpd="sng" algn="ctr">
                       <a:solidFill>
                         <a:srgbClr val="1E293B"/>
@@ -7130,7 +7095,7 @@
                     <a:bodyPr/>
                     <a:lstStyle/>
                     <a:p>
-                      <a:pPr algn="ctr" indent="0" marL="0">
+                      <a:pPr marL="0" indent="0" algn="ctr">
                         <a:buNone/>
                       </a:pPr>
                       <a:r>
@@ -7144,7 +7109,7 @@
                       <a:endParaRPr lang="en-US" sz="1200" dirty="0"/>
                     </a:p>
                   </a:txBody>
-                  <a:tcPr marL="91440" marR="91440" marT="45720" marB="45720" anchor="ctr">
+                  <a:tcPr anchor="ctr">
                     <a:lnL w="6350" cap="flat" cmpd="sng" algn="ctr">
                       <a:solidFill>
                         <a:srgbClr val="1E293B"/>
@@ -7186,6 +7151,11 @@
                     </a:solidFill>
                   </a:tcPr>
                 </a:tc>
+                <a:extLst>
+                  <a:ext uri="{0D108BD9-81ED-4DB2-BD59-A6C34878D82A}">
+                    <a16:rowId xmlns:a16="http://schemas.microsoft.com/office/drawing/2014/main" val="10000"/>
+                  </a:ext>
+                </a:extLst>
               </a:tr>
               <a:tr h="502920">
                 <a:tc>
@@ -7193,7 +7163,7 @@
                     <a:bodyPr/>
                     <a:lstStyle/>
                     <a:p>
-                      <a:pPr algn="l" indent="0" marL="0">
+                      <a:pPr marL="0" indent="0" algn="l">
                         <a:buNone/>
                       </a:pPr>
                       <a:r>
@@ -7207,7 +7177,7 @@
                       <a:endParaRPr lang="en-US" sz="1400" dirty="0"/>
                     </a:p>
                   </a:txBody>
-                  <a:tcPr marL="91440" marR="91440" marT="45720" marB="45720" anchor="ctr">
+                  <a:tcPr anchor="ctr">
                     <a:lnL w="6350" cap="flat" cmpd="sng" algn="ctr">
                       <a:solidFill>
                         <a:srgbClr val="1E293B"/>
@@ -7254,7 +7224,7 @@
                     <a:bodyPr/>
                     <a:lstStyle/>
                     <a:p>
-                      <a:pPr algn="ctr" indent="0" marL="0">
+                      <a:pPr marL="0" indent="0" algn="ctr">
                         <a:buNone/>
                       </a:pPr>
                       <a:r>
@@ -7268,7 +7238,7 @@
                       <a:endParaRPr lang="en-US" sz="1400" dirty="0"/>
                     </a:p>
                   </a:txBody>
-                  <a:tcPr marL="91440" marR="91440" marT="45720" marB="45720" anchor="ctr">
+                  <a:tcPr anchor="ctr">
                     <a:lnL w="6350" cap="flat" cmpd="sng" algn="ctr">
                       <a:solidFill>
                         <a:srgbClr val="1E293B"/>
@@ -7315,7 +7285,7 @@
                     <a:bodyPr/>
                     <a:lstStyle/>
                     <a:p>
-                      <a:pPr algn="ctr" indent="0" marL="0">
+                      <a:pPr marL="0" indent="0" algn="ctr">
                         <a:buNone/>
                       </a:pPr>
                       <a:r>
@@ -7329,7 +7299,7 @@
                       <a:endParaRPr lang="en-US" sz="1400" dirty="0"/>
                     </a:p>
                   </a:txBody>
-                  <a:tcPr marL="91440" marR="91440" marT="45720" marB="45720" anchor="ctr">
+                  <a:tcPr anchor="ctr">
                     <a:lnL w="6350" cap="flat" cmpd="sng" algn="ctr">
                       <a:solidFill>
                         <a:srgbClr val="1E293B"/>
@@ -7371,6 +7341,11 @@
                     </a:solidFill>
                   </a:tcPr>
                 </a:tc>
+                <a:extLst>
+                  <a:ext uri="{0D108BD9-81ED-4DB2-BD59-A6C34878D82A}">
+                    <a16:rowId xmlns:a16="http://schemas.microsoft.com/office/drawing/2014/main" val="10001"/>
+                  </a:ext>
+                </a:extLst>
               </a:tr>
               <a:tr h="502920">
                 <a:tc>
@@ -7378,7 +7353,7 @@
                     <a:bodyPr/>
                     <a:lstStyle/>
                     <a:p>
-                      <a:pPr algn="l" indent="0" marL="0">
+                      <a:pPr marL="0" indent="0" algn="l">
                         <a:buNone/>
                       </a:pPr>
                       <a:r>
@@ -7392,7 +7367,7 @@
                       <a:endParaRPr lang="en-US" sz="1400" dirty="0"/>
                     </a:p>
                   </a:txBody>
-                  <a:tcPr marL="91440" marR="91440" marT="45720" marB="45720" anchor="ctr">
+                  <a:tcPr anchor="ctr">
                     <a:lnL w="6350" cap="flat" cmpd="sng" algn="ctr">
                       <a:solidFill>
                         <a:srgbClr val="1E293B"/>
@@ -7439,7 +7414,7 @@
                     <a:bodyPr/>
                     <a:lstStyle/>
                     <a:p>
-                      <a:pPr algn="ctr" indent="0" marL="0">
+                      <a:pPr marL="0" indent="0" algn="ctr">
                         <a:buNone/>
                       </a:pPr>
                       <a:r>
@@ -7453,7 +7428,7 @@
                       <a:endParaRPr lang="en-US" sz="1400" dirty="0"/>
                     </a:p>
                   </a:txBody>
-                  <a:tcPr marL="91440" marR="91440" marT="45720" marB="45720" anchor="ctr">
+                  <a:tcPr anchor="ctr">
                     <a:lnL w="6350" cap="flat" cmpd="sng" algn="ctr">
                       <a:solidFill>
                         <a:srgbClr val="1E293B"/>
@@ -7500,7 +7475,7 @@
                     <a:bodyPr/>
                     <a:lstStyle/>
                     <a:p>
-                      <a:pPr algn="ctr" indent="0" marL="0">
+                      <a:pPr marL="0" indent="0" algn="ctr">
                         <a:buNone/>
                       </a:pPr>
                       <a:r>
@@ -7514,7 +7489,7 @@
                       <a:endParaRPr lang="en-US" sz="1400" dirty="0"/>
                     </a:p>
                   </a:txBody>
-                  <a:tcPr marL="91440" marR="91440" marT="45720" marB="45720" anchor="ctr">
+                  <a:tcPr anchor="ctr">
                     <a:lnL w="6350" cap="flat" cmpd="sng" algn="ctr">
                       <a:solidFill>
                         <a:srgbClr val="1E293B"/>
@@ -7556,6 +7531,11 @@
                     </a:solidFill>
                   </a:tcPr>
                 </a:tc>
+                <a:extLst>
+                  <a:ext uri="{0D108BD9-81ED-4DB2-BD59-A6C34878D82A}">
+                    <a16:rowId xmlns:a16="http://schemas.microsoft.com/office/drawing/2014/main" val="10002"/>
+                  </a:ext>
+                </a:extLst>
               </a:tr>
               <a:tr h="502920">
                 <a:tc>
@@ -7563,7 +7543,7 @@
                     <a:bodyPr/>
                     <a:lstStyle/>
                     <a:p>
-                      <a:pPr algn="l" indent="0" marL="0">
+                      <a:pPr marL="0" indent="0" algn="l">
                         <a:buNone/>
                       </a:pPr>
                       <a:r>
@@ -7577,7 +7557,7 @@
                       <a:endParaRPr lang="en-US" sz="1400" dirty="0"/>
                     </a:p>
                   </a:txBody>
-                  <a:tcPr marL="91440" marR="91440" marT="45720" marB="45720" anchor="ctr">
+                  <a:tcPr anchor="ctr">
                     <a:lnL w="6350" cap="flat" cmpd="sng" algn="ctr">
                       <a:solidFill>
                         <a:srgbClr val="1E293B"/>
@@ -7624,7 +7604,7 @@
                     <a:bodyPr/>
                     <a:lstStyle/>
                     <a:p>
-                      <a:pPr algn="ctr" indent="0" marL="0">
+                      <a:pPr marL="0" indent="0" algn="ctr">
                         <a:buNone/>
                       </a:pPr>
                       <a:r>
@@ -7638,7 +7618,7 @@
                       <a:endParaRPr lang="en-US" sz="1400" dirty="0"/>
                     </a:p>
                   </a:txBody>
-                  <a:tcPr marL="91440" marR="91440" marT="45720" marB="45720" anchor="ctr">
+                  <a:tcPr anchor="ctr">
                     <a:lnL w="6350" cap="flat" cmpd="sng" algn="ctr">
                       <a:solidFill>
                         <a:srgbClr val="1E293B"/>
@@ -7685,7 +7665,7 @@
                     <a:bodyPr/>
                     <a:lstStyle/>
                     <a:p>
-                      <a:pPr algn="ctr" indent="0" marL="0">
+                      <a:pPr marL="0" indent="0" algn="ctr">
                         <a:buNone/>
                       </a:pPr>
                       <a:r>
@@ -7699,7 +7679,7 @@
                       <a:endParaRPr lang="en-US" sz="1400" dirty="0"/>
                     </a:p>
                   </a:txBody>
-                  <a:tcPr marL="91440" marR="91440" marT="45720" marB="45720" anchor="ctr">
+                  <a:tcPr anchor="ctr">
                     <a:lnL w="6350" cap="flat" cmpd="sng" algn="ctr">
                       <a:solidFill>
                         <a:srgbClr val="1E293B"/>
@@ -7741,6 +7721,11 @@
                     </a:solidFill>
                   </a:tcPr>
                 </a:tc>
+                <a:extLst>
+                  <a:ext uri="{0D108BD9-81ED-4DB2-BD59-A6C34878D82A}">
+                    <a16:rowId xmlns:a16="http://schemas.microsoft.com/office/drawing/2014/main" val="10003"/>
+                  </a:ext>
+                </a:extLst>
               </a:tr>
             </a:tbl>
           </a:graphicData>
@@ -7765,13 +7750,20 @@
           </a:solidFill>
           <a:ln/>
           <a:effectLst>
-            <a:outerShdw sx="100000" sy="100000" kx="0" ky="0" algn="bl" rotWithShape="0" blurRad="127000" dist="38100" dir="8100000">
+            <a:outerShdw blurRad="127000" dist="38100" dir="8100000" algn="bl" rotWithShape="0">
               <a:srgbClr val="000000">
                 <a:alpha val="35000"/>
               </a:srgbClr>
             </a:outerShdw>
           </a:effectLst>
         </p:spPr>
+        <p:txBody>
+          <a:bodyPr/>
+          <a:lstStyle/>
+          <a:p>
+            <a:endParaRPr lang="en-US"/>
+          </a:p>
+        </p:txBody>
       </p:sp>
       <p:sp>
         <p:nvSpPr>
@@ -7792,17 +7784,24 @@
           </a:solidFill>
           <a:ln/>
         </p:spPr>
+        <p:txBody>
+          <a:bodyPr/>
+          <a:lstStyle/>
+          <a:p>
+            <a:endParaRPr lang="en-US"/>
+          </a:p>
+        </p:txBody>
       </p:sp>
       <p:pic>
         <p:nvPicPr>
-          <p:cNvPr id="10" name="Image 0" descr="preencoded.png">    </p:cNvPr>
+          <p:cNvPr id="10" name="Image 0" descr="preencoded.png"/>
           <p:cNvPicPr>
             <a:picLocks noChangeAspect="1"/>
           </p:cNvPicPr>
           <p:nvPr/>
         </p:nvPicPr>
         <p:blipFill>
-          <a:blip r:embed="rId1"/>
+          <a:blip r:embed="rId3"/>
           <a:stretch>
             <a:fillRect/>
           </a:stretch>
@@ -7838,7 +7837,7 @@
           <a:bodyPr wrap="square" lIns="0" tIns="0" rIns="0" bIns="0" rtlCol="0" anchor="ctr"/>
           <a:lstStyle/>
           <a:p>
-            <a:pPr indent="0" marL="0">
+            <a:pPr marL="0" indent="0">
               <a:buNone/>
             </a:pPr>
             <a:r>
@@ -7874,7 +7873,7 @@
           <a:bodyPr wrap="square" lIns="0" tIns="0" rIns="0" bIns="0" rtlCol="0" anchor="ctr"/>
           <a:lstStyle/>
           <a:p>
-            <a:pPr indent="0" marL="0">
+            <a:pPr marL="0" indent="0">
               <a:buNone/>
             </a:pPr>
             <a:r>
@@ -7910,7 +7909,7 @@
           <a:bodyPr wrap="square" lIns="0" tIns="0" rIns="0" bIns="0" rtlCol="0" anchor="ctr"/>
           <a:lstStyle/>
           <a:p>
-            <a:pPr indent="0" marL="0">
+            <a:pPr marL="0" indent="0">
               <a:lnSpc>
                 <a:spcPct val="135000"/>
               </a:lnSpc>
@@ -7947,13 +7946,20 @@
           </a:solidFill>
           <a:ln/>
           <a:effectLst>
-            <a:outerShdw sx="100000" sy="100000" kx="0" ky="0" algn="bl" rotWithShape="0" blurRad="127000" dist="38100" dir="8100000">
+            <a:outerShdw blurRad="127000" dist="38100" dir="8100000" algn="bl" rotWithShape="0">
               <a:srgbClr val="000000">
                 <a:alpha val="35000"/>
               </a:srgbClr>
             </a:outerShdw>
           </a:effectLst>
         </p:spPr>
+        <p:txBody>
+          <a:bodyPr/>
+          <a:lstStyle/>
+          <a:p>
+            <a:endParaRPr lang="en-US"/>
+          </a:p>
+        </p:txBody>
       </p:sp>
       <p:sp>
         <p:nvSpPr>
@@ -7974,17 +7980,24 @@
           </a:solidFill>
           <a:ln/>
         </p:spPr>
+        <p:txBody>
+          <a:bodyPr/>
+          <a:lstStyle/>
+          <a:p>
+            <a:endParaRPr lang="en-US"/>
+          </a:p>
+        </p:txBody>
       </p:sp>
       <p:pic>
         <p:nvPicPr>
-          <p:cNvPr id="16" name="Image 1" descr="preencoded.png">    </p:cNvPr>
+          <p:cNvPr id="16" name="Image 1" descr="preencoded.png"/>
           <p:cNvPicPr>
             <a:picLocks noChangeAspect="1"/>
           </p:cNvPicPr>
           <p:nvPr/>
         </p:nvPicPr>
         <p:blipFill>
-          <a:blip r:embed="rId2"/>
+          <a:blip r:embed="rId4"/>
           <a:stretch>
             <a:fillRect/>
           </a:stretch>
@@ -8020,7 +8033,7 @@
           <a:bodyPr wrap="square" lIns="0" tIns="0" rIns="0" bIns="0" rtlCol="0" anchor="ctr"/>
           <a:lstStyle/>
           <a:p>
-            <a:pPr indent="0" marL="0">
+            <a:pPr marL="0" indent="0">
               <a:buNone/>
             </a:pPr>
             <a:r>
@@ -8056,7 +8069,7 @@
           <a:bodyPr wrap="square" lIns="0" tIns="0" rIns="0" bIns="0" rtlCol="0" anchor="ctr"/>
           <a:lstStyle/>
           <a:p>
-            <a:pPr indent="0" marL="0">
+            <a:pPr marL="0" indent="0">
               <a:buNone/>
             </a:pPr>
             <a:r>
@@ -8092,7 +8105,7 @@
           <a:bodyPr wrap="square" lIns="0" tIns="0" rIns="0" bIns="0" rtlCol="0" anchor="ctr"/>
           <a:lstStyle/>
           <a:p>
-            <a:pPr indent="0" marL="0">
+            <a:pPr marL="0" indent="0">
               <a:lnSpc>
                 <a:spcPct val="135000"/>
               </a:lnSpc>
@@ -8129,6 +8142,13 @@
           </a:solidFill>
           <a:ln/>
         </p:spPr>
+        <p:txBody>
+          <a:bodyPr/>
+          <a:lstStyle/>
+          <a:p>
+            <a:endParaRPr lang="en-US"/>
+          </a:p>
+        </p:txBody>
       </p:sp>
       <p:sp>
         <p:nvSpPr>
@@ -8149,6 +8169,13 @@
           </a:solidFill>
           <a:ln/>
         </p:spPr>
+        <p:txBody>
+          <a:bodyPr/>
+          <a:lstStyle/>
+          <a:p>
+            <a:endParaRPr lang="en-US"/>
+          </a:p>
+        </p:txBody>
       </p:sp>
       <p:sp>
         <p:nvSpPr>
@@ -8171,7 +8198,7 @@
           <a:bodyPr wrap="square" lIns="0" tIns="0" rIns="0" bIns="0" rtlCol="0" anchor="ctr"/>
           <a:lstStyle/>
           <a:p>
-            <a:pPr indent="0" marL="0">
+            <a:pPr marL="0" indent="0">
               <a:lnSpc>
                 <a:spcPct val="130000"/>
               </a:lnSpc>
@@ -8183,7 +8210,7 @@
                   <a:srgbClr val="CBD5E1"/>
                 </a:solidFill>
               </a:rPr>
-              <a:t>Key insight: For N=9,600, Amdahl predicts a theoretical ceiling of ~83×  — the current 24-rank hardware (6.5×) sits far below; scaling headroom remains.</a:t>
+              <a:t>Key insight: For N=9,600, Amdahl predicts a theoretical ceiling of ~83×  — the current 24-rank hardware (6.5×) sits far below that estimate.</a:t>
             </a:r>
             <a:endParaRPr lang="en-US" sz="1100" dirty="0"/>
           </a:p>
@@ -8205,6 +8232,7 @@
         <a:solidFill>
           <a:srgbClr val="0A0F1E"/>
         </a:solidFill>
+        <a:effectLst/>
       </p:bgPr>
     </p:bg>
     <p:spTree>
@@ -8242,11 +8270,11 @@
           <a:bodyPr wrap="square" lIns="0" tIns="0" rIns="0" bIns="0" rtlCol="0" anchor="ctr"/>
           <a:lstStyle/>
           <a:p>
-            <a:pPr indent="0" marL="0">
+            <a:pPr marL="0" indent="0">
               <a:buNone/>
             </a:pPr>
             <a:r>
-              <a:rPr lang="en-US" sz="1000" b="1" spc="500" kern="0" dirty="0">
+              <a:rPr lang="en-US" sz="1000" b="1" kern="0" spc="500" dirty="0">
                 <a:solidFill>
                   <a:srgbClr val="F59E0B"/>
                 </a:solidFill>
@@ -8278,7 +8306,7 @@
           <a:bodyPr wrap="square" lIns="0" tIns="0" rIns="0" bIns="0" rtlCol="0" anchor="ctr"/>
           <a:lstStyle/>
           <a:p>
-            <a:pPr indent="0" marL="0">
+            <a:pPr marL="0" indent="0">
               <a:buNone/>
             </a:pPr>
             <a:r>
@@ -8295,7 +8323,7 @@
       </p:sp>
       <p:graphicFrame>
         <p:nvGraphicFramePr>
-          <p:cNvPr id="4" name="Chart 0" descr=""/>
+          <p:cNvPr id="4" name="Chart 0"/>
           <p:cNvGraphicFramePr/>
           <p:nvPr/>
         </p:nvGraphicFramePr>
@@ -8303,9 +8331,9 @@
           <a:off x="274320" y="1051560"/>
           <a:ext cx="5120640" cy="3886200"/>
         </p:xfrm>
-        <a:graphic xmlns:a="http://schemas.openxmlformats.org/drawingml/2006/main">
+        <a:graphic>
           <a:graphicData uri="http://schemas.openxmlformats.org/drawingml/2006/chart">
-            <c:chart xmlns:c="http://schemas.openxmlformats.org/drawingml/2006/chart" r:id="rId1"/>
+            <c:chart xmlns:c="http://schemas.openxmlformats.org/drawingml/2006/chart" xmlns:r="http://schemas.openxmlformats.org/officeDocument/2006/relationships" r:id="rId3"/>
           </a:graphicData>
         </a:graphic>
       </p:graphicFrame>
@@ -8325,17 +8353,41 @@
         </p:nvGraphicFramePr>
         <p:xfrm>
           <a:off x="5577840" y="1051560"/>
-          <a:ext cx="3291840" cy="3931920"/>
+          <a:ext cx="3291840" cy="3950208"/>
         </p:xfrm>
         <a:graphic>
           <a:graphicData uri="http://schemas.openxmlformats.org/drawingml/2006/table">
             <a:tbl>
               <a:tblPr/>
               <a:tblGrid>
-                <a:gridCol w="822960"/>
-                <a:gridCol w="822960"/>
-                <a:gridCol w="822960"/>
-                <a:gridCol w="822960"/>
+                <a:gridCol w="822960">
+                  <a:extLst>
+                    <a:ext uri="{9D8B030D-6E8A-4147-A177-3AD203B41FA5}">
+                      <a16:colId xmlns:a16="http://schemas.microsoft.com/office/drawing/2014/main" val="20000"/>
+                    </a:ext>
+                  </a:extLst>
+                </a:gridCol>
+                <a:gridCol w="822960">
+                  <a:extLst>
+                    <a:ext uri="{9D8B030D-6E8A-4147-A177-3AD203B41FA5}">
+                      <a16:colId xmlns:a16="http://schemas.microsoft.com/office/drawing/2014/main" val="20001"/>
+                    </a:ext>
+                  </a:extLst>
+                </a:gridCol>
+                <a:gridCol w="822960">
+                  <a:extLst>
+                    <a:ext uri="{9D8B030D-6E8A-4147-A177-3AD203B41FA5}">
+                      <a16:colId xmlns:a16="http://schemas.microsoft.com/office/drawing/2014/main" val="20002"/>
+                    </a:ext>
+                  </a:extLst>
+                </a:gridCol>
+                <a:gridCol w="822960">
+                  <a:extLst>
+                    <a:ext uri="{9D8B030D-6E8A-4147-A177-3AD203B41FA5}">
+                      <a16:colId xmlns:a16="http://schemas.microsoft.com/office/drawing/2014/main" val="20003"/>
+                    </a:ext>
+                  </a:extLst>
+                </a:gridCol>
               </a:tblGrid>
               <a:tr h="438912">
                 <a:tc>
@@ -8343,7 +8395,7 @@
                     <a:bodyPr/>
                     <a:lstStyle/>
                     <a:p>
-                      <a:pPr algn="ctr" indent="0" marL="0">
+                      <a:pPr marL="0" indent="0" algn="ctr">
                         <a:buNone/>
                       </a:pPr>
                       <a:r>
@@ -8357,7 +8409,7 @@
                       <a:endParaRPr lang="en-US" sz="1200" dirty="0"/>
                     </a:p>
                   </a:txBody>
-                  <a:tcPr marL="91440" marR="91440" marT="45720" marB="45720" anchor="ctr">
+                  <a:tcPr anchor="ctr">
                     <a:lnL w="6350" cap="flat" cmpd="sng" algn="ctr">
                       <a:solidFill>
                         <a:srgbClr val="1E293B"/>
@@ -8404,7 +8456,7 @@
                     <a:bodyPr/>
                     <a:lstStyle/>
                     <a:p>
-                      <a:pPr algn="r" indent="0" marL="0">
+                      <a:pPr marL="0" indent="0" algn="r">
                         <a:buNone/>
                       </a:pPr>
                       <a:r>
@@ -8418,7 +8470,7 @@
                       <a:endParaRPr lang="en-US" sz="1200" dirty="0"/>
                     </a:p>
                   </a:txBody>
-                  <a:tcPr marL="91440" marR="91440" marT="45720" marB="45720" anchor="ctr">
+                  <a:tcPr anchor="ctr">
                     <a:lnL w="6350" cap="flat" cmpd="sng" algn="ctr">
                       <a:solidFill>
                         <a:srgbClr val="1E293B"/>
@@ -8465,7 +8517,7 @@
                     <a:bodyPr/>
                     <a:lstStyle/>
                     <a:p>
-                      <a:pPr algn="r" indent="0" marL="0">
+                      <a:pPr marL="0" indent="0" algn="r">
                         <a:buNone/>
                       </a:pPr>
                       <a:r>
@@ -8479,7 +8531,7 @@
                       <a:endParaRPr lang="en-US" sz="1200" dirty="0"/>
                     </a:p>
                   </a:txBody>
-                  <a:tcPr marL="91440" marR="91440" marT="45720" marB="45720" anchor="ctr">
+                  <a:tcPr anchor="ctr">
                     <a:lnL w="6350" cap="flat" cmpd="sng" algn="ctr">
                       <a:solidFill>
                         <a:srgbClr val="1E293B"/>
@@ -8526,7 +8578,7 @@
                     <a:bodyPr/>
                     <a:lstStyle/>
                     <a:p>
-                      <a:pPr algn="r" indent="0" marL="0">
+                      <a:pPr marL="0" indent="0" algn="r">
                         <a:buNone/>
                       </a:pPr>
                       <a:r>
@@ -8540,7 +8592,7 @@
                       <a:endParaRPr lang="en-US" sz="1200" dirty="0"/>
                     </a:p>
                   </a:txBody>
-                  <a:tcPr marL="91440" marR="91440" marT="45720" marB="45720" anchor="ctr">
+                  <a:tcPr anchor="ctr">
                     <a:lnL w="6350" cap="flat" cmpd="sng" algn="ctr">
                       <a:solidFill>
                         <a:srgbClr val="1E293B"/>
@@ -8582,6 +8634,11 @@
                     </a:solidFill>
                   </a:tcPr>
                 </a:tc>
+                <a:extLst>
+                  <a:ext uri="{0D108BD9-81ED-4DB2-BD59-A6C34878D82A}">
+                    <a16:rowId xmlns:a16="http://schemas.microsoft.com/office/drawing/2014/main" val="10000"/>
+                  </a:ext>
+                </a:extLst>
               </a:tr>
               <a:tr h="438912">
                 <a:tc>
@@ -8589,7 +8646,7 @@
                     <a:bodyPr/>
                     <a:lstStyle/>
                     <a:p>
-                      <a:pPr algn="ctr" indent="0" marL="0">
+                      <a:pPr marL="0" indent="0" algn="ctr">
                         <a:buNone/>
                       </a:pPr>
                       <a:r>
@@ -8603,7 +8660,7 @@
                       <a:endParaRPr lang="en-US" sz="1300" dirty="0"/>
                     </a:p>
                   </a:txBody>
-                  <a:tcPr marL="91440" marR="91440" marT="45720" marB="45720" anchor="ctr">
+                  <a:tcPr anchor="ctr">
                     <a:lnL w="6350" cap="flat" cmpd="sng" algn="ctr">
                       <a:solidFill>
                         <a:srgbClr val="1E293B"/>
@@ -8650,7 +8707,7 @@
                     <a:bodyPr/>
                     <a:lstStyle/>
                     <a:p>
-                      <a:pPr algn="r" indent="0" marL="0">
+                      <a:pPr marL="0" indent="0" algn="r">
                         <a:buNone/>
                       </a:pPr>
                       <a:r>
@@ -8664,7 +8721,7 @@
                       <a:endParaRPr lang="en-US" sz="1300" dirty="0"/>
                     </a:p>
                   </a:txBody>
-                  <a:tcPr marL="91440" marR="91440" marT="45720" marB="45720" anchor="ctr">
+                  <a:tcPr anchor="ctr">
                     <a:lnL w="6350" cap="flat" cmpd="sng" algn="ctr">
                       <a:solidFill>
                         <a:srgbClr val="1E293B"/>
@@ -8711,7 +8768,7 @@
                     <a:bodyPr/>
                     <a:lstStyle/>
                     <a:p>
-                      <a:pPr algn="r" indent="0" marL="0">
+                      <a:pPr marL="0" indent="0" algn="r">
                         <a:buNone/>
                       </a:pPr>
                       <a:r>
@@ -8725,7 +8782,7 @@
                       <a:endParaRPr lang="en-US" sz="1300" dirty="0"/>
                     </a:p>
                   </a:txBody>
-                  <a:tcPr marL="91440" marR="91440" marT="45720" marB="45720" anchor="ctr">
+                  <a:tcPr anchor="ctr">
                     <a:lnL w="6350" cap="flat" cmpd="sng" algn="ctr">
                       <a:solidFill>
                         <a:srgbClr val="1E293B"/>
@@ -8772,7 +8829,7 @@
                     <a:bodyPr/>
                     <a:lstStyle/>
                     <a:p>
-                      <a:pPr algn="r" indent="0" marL="0">
+                      <a:pPr marL="0" indent="0" algn="r">
                         <a:buNone/>
                       </a:pPr>
                       <a:r>
@@ -8786,7 +8843,7 @@
                       <a:endParaRPr lang="en-US" sz="1300" dirty="0"/>
                     </a:p>
                   </a:txBody>
-                  <a:tcPr marL="91440" marR="91440" marT="45720" marB="45720" anchor="ctr">
+                  <a:tcPr anchor="ctr">
                     <a:lnL w="6350" cap="flat" cmpd="sng" algn="ctr">
                       <a:solidFill>
                         <a:srgbClr val="1E293B"/>
@@ -8828,6 +8885,11 @@
                     </a:solidFill>
                   </a:tcPr>
                 </a:tc>
+                <a:extLst>
+                  <a:ext uri="{0D108BD9-81ED-4DB2-BD59-A6C34878D82A}">
+                    <a16:rowId xmlns:a16="http://schemas.microsoft.com/office/drawing/2014/main" val="10001"/>
+                  </a:ext>
+                </a:extLst>
               </a:tr>
               <a:tr h="438912">
                 <a:tc>
@@ -8835,7 +8897,7 @@
                     <a:bodyPr/>
                     <a:lstStyle/>
                     <a:p>
-                      <a:pPr algn="ctr" indent="0" marL="0">
+                      <a:pPr marL="0" indent="0" algn="ctr">
                         <a:buNone/>
                       </a:pPr>
                       <a:r>
@@ -8849,7 +8911,7 @@
                       <a:endParaRPr lang="en-US" sz="1300" dirty="0"/>
                     </a:p>
                   </a:txBody>
-                  <a:tcPr marL="91440" marR="91440" marT="45720" marB="45720" anchor="ctr">
+                  <a:tcPr anchor="ctr">
                     <a:lnL w="6350" cap="flat" cmpd="sng" algn="ctr">
                       <a:solidFill>
                         <a:srgbClr val="1E293B"/>
@@ -8896,7 +8958,7 @@
                     <a:bodyPr/>
                     <a:lstStyle/>
                     <a:p>
-                      <a:pPr algn="r" indent="0" marL="0">
+                      <a:pPr marL="0" indent="0" algn="r">
                         <a:buNone/>
                       </a:pPr>
                       <a:r>
@@ -8910,7 +8972,7 @@
                       <a:endParaRPr lang="en-US" sz="1300" dirty="0"/>
                     </a:p>
                   </a:txBody>
-                  <a:tcPr marL="91440" marR="91440" marT="45720" marB="45720" anchor="ctr">
+                  <a:tcPr anchor="ctr">
                     <a:lnL w="6350" cap="flat" cmpd="sng" algn="ctr">
                       <a:solidFill>
                         <a:srgbClr val="1E293B"/>
@@ -8957,7 +9019,7 @@
                     <a:bodyPr/>
                     <a:lstStyle/>
                     <a:p>
-                      <a:pPr algn="r" indent="0" marL="0">
+                      <a:pPr marL="0" indent="0" algn="r">
                         <a:buNone/>
                       </a:pPr>
                       <a:r>
@@ -8971,7 +9033,7 @@
                       <a:endParaRPr lang="en-US" sz="1300" dirty="0"/>
                     </a:p>
                   </a:txBody>
-                  <a:tcPr marL="91440" marR="91440" marT="45720" marB="45720" anchor="ctr">
+                  <a:tcPr anchor="ctr">
                     <a:lnL w="6350" cap="flat" cmpd="sng" algn="ctr">
                       <a:solidFill>
                         <a:srgbClr val="1E293B"/>
@@ -9018,7 +9080,7 @@
                     <a:bodyPr/>
                     <a:lstStyle/>
                     <a:p>
-                      <a:pPr algn="r" indent="0" marL="0">
+                      <a:pPr marL="0" indent="0" algn="r">
                         <a:buNone/>
                       </a:pPr>
                       <a:r>
@@ -9032,7 +9094,7 @@
                       <a:endParaRPr lang="en-US" sz="1300" dirty="0"/>
                     </a:p>
                   </a:txBody>
-                  <a:tcPr marL="91440" marR="91440" marT="45720" marB="45720" anchor="ctr">
+                  <a:tcPr anchor="ctr">
                     <a:lnL w="6350" cap="flat" cmpd="sng" algn="ctr">
                       <a:solidFill>
                         <a:srgbClr val="1E293B"/>
@@ -9074,6 +9136,11 @@
                     </a:solidFill>
                   </a:tcPr>
                 </a:tc>
+                <a:extLst>
+                  <a:ext uri="{0D108BD9-81ED-4DB2-BD59-A6C34878D82A}">
+                    <a16:rowId xmlns:a16="http://schemas.microsoft.com/office/drawing/2014/main" val="10002"/>
+                  </a:ext>
+                </a:extLst>
               </a:tr>
               <a:tr h="438912">
                 <a:tc>
@@ -9081,7 +9148,7 @@
                     <a:bodyPr/>
                     <a:lstStyle/>
                     <a:p>
-                      <a:pPr algn="ctr" indent="0" marL="0">
+                      <a:pPr marL="0" indent="0" algn="ctr">
                         <a:buNone/>
                       </a:pPr>
                       <a:r>
@@ -9095,7 +9162,7 @@
                       <a:endParaRPr lang="en-US" sz="1300" dirty="0"/>
                     </a:p>
                   </a:txBody>
-                  <a:tcPr marL="91440" marR="91440" marT="45720" marB="45720" anchor="ctr">
+                  <a:tcPr anchor="ctr">
                     <a:lnL w="6350" cap="flat" cmpd="sng" algn="ctr">
                       <a:solidFill>
                         <a:srgbClr val="1E293B"/>
@@ -9142,7 +9209,7 @@
                     <a:bodyPr/>
                     <a:lstStyle/>
                     <a:p>
-                      <a:pPr algn="r" indent="0" marL="0">
+                      <a:pPr marL="0" indent="0" algn="r">
                         <a:buNone/>
                       </a:pPr>
                       <a:r>
@@ -9156,7 +9223,7 @@
                       <a:endParaRPr lang="en-US" sz="1300" dirty="0"/>
                     </a:p>
                   </a:txBody>
-                  <a:tcPr marL="91440" marR="91440" marT="45720" marB="45720" anchor="ctr">
+                  <a:tcPr anchor="ctr">
                     <a:lnL w="6350" cap="flat" cmpd="sng" algn="ctr">
                       <a:solidFill>
                         <a:srgbClr val="1E293B"/>
@@ -9203,7 +9270,7 @@
                     <a:bodyPr/>
                     <a:lstStyle/>
                     <a:p>
-                      <a:pPr algn="r" indent="0" marL="0">
+                      <a:pPr marL="0" indent="0" algn="r">
                         <a:buNone/>
                       </a:pPr>
                       <a:r>
@@ -9217,7 +9284,7 @@
                       <a:endParaRPr lang="en-US" sz="1300" dirty="0"/>
                     </a:p>
                   </a:txBody>
-                  <a:tcPr marL="91440" marR="91440" marT="45720" marB="45720" anchor="ctr">
+                  <a:tcPr anchor="ctr">
                     <a:lnL w="6350" cap="flat" cmpd="sng" algn="ctr">
                       <a:solidFill>
                         <a:srgbClr val="1E293B"/>
@@ -9264,7 +9331,7 @@
                     <a:bodyPr/>
                     <a:lstStyle/>
                     <a:p>
-                      <a:pPr algn="r" indent="0" marL="0">
+                      <a:pPr marL="0" indent="0" algn="r">
                         <a:buNone/>
                       </a:pPr>
                       <a:r>
@@ -9278,7 +9345,7 @@
                       <a:endParaRPr lang="en-US" sz="1300" dirty="0"/>
                     </a:p>
                   </a:txBody>
-                  <a:tcPr marL="91440" marR="91440" marT="45720" marB="45720" anchor="ctr">
+                  <a:tcPr anchor="ctr">
                     <a:lnL w="6350" cap="flat" cmpd="sng" algn="ctr">
                       <a:solidFill>
                         <a:srgbClr val="1E293B"/>
@@ -9320,6 +9387,11 @@
                     </a:solidFill>
                   </a:tcPr>
                 </a:tc>
+                <a:extLst>
+                  <a:ext uri="{0D108BD9-81ED-4DB2-BD59-A6C34878D82A}">
+                    <a16:rowId xmlns:a16="http://schemas.microsoft.com/office/drawing/2014/main" val="10003"/>
+                  </a:ext>
+                </a:extLst>
               </a:tr>
               <a:tr h="438912">
                 <a:tc>
@@ -9327,7 +9399,7 @@
                     <a:bodyPr/>
                     <a:lstStyle/>
                     <a:p>
-                      <a:pPr algn="ctr" indent="0" marL="0">
+                      <a:pPr marL="0" indent="0" algn="ctr">
                         <a:buNone/>
                       </a:pPr>
                       <a:r>
@@ -9341,7 +9413,7 @@
                       <a:endParaRPr lang="en-US" sz="1300" dirty="0"/>
                     </a:p>
                   </a:txBody>
-                  <a:tcPr marL="91440" marR="91440" marT="45720" marB="45720" anchor="ctr">
+                  <a:tcPr anchor="ctr">
                     <a:lnL w="6350" cap="flat" cmpd="sng" algn="ctr">
                       <a:solidFill>
                         <a:srgbClr val="1E293B"/>
@@ -9388,7 +9460,7 @@
                     <a:bodyPr/>
                     <a:lstStyle/>
                     <a:p>
-                      <a:pPr algn="r" indent="0" marL="0">
+                      <a:pPr marL="0" indent="0" algn="r">
                         <a:buNone/>
                       </a:pPr>
                       <a:r>
@@ -9402,7 +9474,7 @@
                       <a:endParaRPr lang="en-US" sz="1300" dirty="0"/>
                     </a:p>
                   </a:txBody>
-                  <a:tcPr marL="91440" marR="91440" marT="45720" marB="45720" anchor="ctr">
+                  <a:tcPr anchor="ctr">
                     <a:lnL w="6350" cap="flat" cmpd="sng" algn="ctr">
                       <a:solidFill>
                         <a:srgbClr val="1E293B"/>
@@ -9449,7 +9521,7 @@
                     <a:bodyPr/>
                     <a:lstStyle/>
                     <a:p>
-                      <a:pPr algn="r" indent="0" marL="0">
+                      <a:pPr marL="0" indent="0" algn="r">
                         <a:buNone/>
                       </a:pPr>
                       <a:r>
@@ -9463,7 +9535,7 @@
                       <a:endParaRPr lang="en-US" sz="1300" dirty="0"/>
                     </a:p>
                   </a:txBody>
-                  <a:tcPr marL="91440" marR="91440" marT="45720" marB="45720" anchor="ctr">
+                  <a:tcPr anchor="ctr">
                     <a:lnL w="6350" cap="flat" cmpd="sng" algn="ctr">
                       <a:solidFill>
                         <a:srgbClr val="1E293B"/>
@@ -9510,7 +9582,7 @@
                     <a:bodyPr/>
                     <a:lstStyle/>
                     <a:p>
-                      <a:pPr algn="r" indent="0" marL="0">
+                      <a:pPr marL="0" indent="0" algn="r">
                         <a:buNone/>
                       </a:pPr>
                       <a:r>
@@ -9524,7 +9596,7 @@
                       <a:endParaRPr lang="en-US" sz="1300" dirty="0"/>
                     </a:p>
                   </a:txBody>
-                  <a:tcPr marL="91440" marR="91440" marT="45720" marB="45720" anchor="ctr">
+                  <a:tcPr anchor="ctr">
                     <a:lnL w="6350" cap="flat" cmpd="sng" algn="ctr">
                       <a:solidFill>
                         <a:srgbClr val="1E293B"/>
@@ -9566,6 +9638,11 @@
                     </a:solidFill>
                   </a:tcPr>
                 </a:tc>
+                <a:extLst>
+                  <a:ext uri="{0D108BD9-81ED-4DB2-BD59-A6C34878D82A}">
+                    <a16:rowId xmlns:a16="http://schemas.microsoft.com/office/drawing/2014/main" val="10004"/>
+                  </a:ext>
+                </a:extLst>
               </a:tr>
               <a:tr h="438912">
                 <a:tc>
@@ -9573,7 +9650,7 @@
                     <a:bodyPr/>
                     <a:lstStyle/>
                     <a:p>
-                      <a:pPr algn="ctr" indent="0" marL="0">
+                      <a:pPr marL="0" indent="0" algn="ctr">
                         <a:buNone/>
                       </a:pPr>
                       <a:r>
@@ -9587,7 +9664,7 @@
                       <a:endParaRPr lang="en-US" sz="1300" dirty="0"/>
                     </a:p>
                   </a:txBody>
-                  <a:tcPr marL="91440" marR="91440" marT="45720" marB="45720" anchor="ctr">
+                  <a:tcPr anchor="ctr">
                     <a:lnL w="6350" cap="flat" cmpd="sng" algn="ctr">
                       <a:solidFill>
                         <a:srgbClr val="1E293B"/>
@@ -9634,7 +9711,7 @@
                     <a:bodyPr/>
                     <a:lstStyle/>
                     <a:p>
-                      <a:pPr algn="r" indent="0" marL="0">
+                      <a:pPr marL="0" indent="0" algn="r">
                         <a:buNone/>
                       </a:pPr>
                       <a:r>
@@ -9648,7 +9725,7 @@
                       <a:endParaRPr lang="en-US" sz="1300" dirty="0"/>
                     </a:p>
                   </a:txBody>
-                  <a:tcPr marL="91440" marR="91440" marT="45720" marB="45720" anchor="ctr">
+                  <a:tcPr anchor="ctr">
                     <a:lnL w="6350" cap="flat" cmpd="sng" algn="ctr">
                       <a:solidFill>
                         <a:srgbClr val="1E293B"/>
@@ -9695,7 +9772,7 @@
                     <a:bodyPr/>
                     <a:lstStyle/>
                     <a:p>
-                      <a:pPr algn="r" indent="0" marL="0">
+                      <a:pPr marL="0" indent="0" algn="r">
                         <a:buNone/>
                       </a:pPr>
                       <a:r>
@@ -9709,7 +9786,7 @@
                       <a:endParaRPr lang="en-US" sz="1300" dirty="0"/>
                     </a:p>
                   </a:txBody>
-                  <a:tcPr marL="91440" marR="91440" marT="45720" marB="45720" anchor="ctr">
+                  <a:tcPr anchor="ctr">
                     <a:lnL w="6350" cap="flat" cmpd="sng" algn="ctr">
                       <a:solidFill>
                         <a:srgbClr val="1E293B"/>
@@ -9756,7 +9833,7 @@
                     <a:bodyPr/>
                     <a:lstStyle/>
                     <a:p>
-                      <a:pPr algn="r" indent="0" marL="0">
+                      <a:pPr marL="0" indent="0" algn="r">
                         <a:buNone/>
                       </a:pPr>
                       <a:r>
@@ -9770,7 +9847,7 @@
                       <a:endParaRPr lang="en-US" sz="1300" dirty="0"/>
                     </a:p>
                   </a:txBody>
-                  <a:tcPr marL="91440" marR="91440" marT="45720" marB="45720" anchor="ctr">
+                  <a:tcPr anchor="ctr">
                     <a:lnL w="6350" cap="flat" cmpd="sng" algn="ctr">
                       <a:solidFill>
                         <a:srgbClr val="1E293B"/>
@@ -9812,6 +9889,11 @@
                     </a:solidFill>
                   </a:tcPr>
                 </a:tc>
+                <a:extLst>
+                  <a:ext uri="{0D108BD9-81ED-4DB2-BD59-A6C34878D82A}">
+                    <a16:rowId xmlns:a16="http://schemas.microsoft.com/office/drawing/2014/main" val="10005"/>
+                  </a:ext>
+                </a:extLst>
               </a:tr>
               <a:tr h="438912">
                 <a:tc>
@@ -9819,7 +9901,7 @@
                     <a:bodyPr/>
                     <a:lstStyle/>
                     <a:p>
-                      <a:pPr algn="ctr" indent="0" marL="0">
+                      <a:pPr marL="0" indent="0" algn="ctr">
                         <a:buNone/>
                       </a:pPr>
                       <a:r>
@@ -9833,7 +9915,7 @@
                       <a:endParaRPr lang="en-US" sz="1300" dirty="0"/>
                     </a:p>
                   </a:txBody>
-                  <a:tcPr marL="91440" marR="91440" marT="45720" marB="45720" anchor="ctr">
+                  <a:tcPr anchor="ctr">
                     <a:lnL w="6350" cap="flat" cmpd="sng" algn="ctr">
                       <a:solidFill>
                         <a:srgbClr val="1E293B"/>
@@ -9880,7 +9962,7 @@
                     <a:bodyPr/>
                     <a:lstStyle/>
                     <a:p>
-                      <a:pPr algn="r" indent="0" marL="0">
+                      <a:pPr marL="0" indent="0" algn="r">
                         <a:buNone/>
                       </a:pPr>
                       <a:r>
@@ -9894,7 +9976,7 @@
                       <a:endParaRPr lang="en-US" sz="1300" dirty="0"/>
                     </a:p>
                   </a:txBody>
-                  <a:tcPr marL="91440" marR="91440" marT="45720" marB="45720" anchor="ctr">
+                  <a:tcPr anchor="ctr">
                     <a:lnL w="6350" cap="flat" cmpd="sng" algn="ctr">
                       <a:solidFill>
                         <a:srgbClr val="1E293B"/>
@@ -9941,7 +10023,7 @@
                     <a:bodyPr/>
                     <a:lstStyle/>
                     <a:p>
-                      <a:pPr algn="r" indent="0" marL="0">
+                      <a:pPr marL="0" indent="0" algn="r">
                         <a:buNone/>
                       </a:pPr>
                       <a:r>
@@ -9955,7 +10037,7 @@
                       <a:endParaRPr lang="en-US" sz="1300" dirty="0"/>
                     </a:p>
                   </a:txBody>
-                  <a:tcPr marL="91440" marR="91440" marT="45720" marB="45720" anchor="ctr">
+                  <a:tcPr anchor="ctr">
                     <a:lnL w="6350" cap="flat" cmpd="sng" algn="ctr">
                       <a:solidFill>
                         <a:srgbClr val="1E293B"/>
@@ -10002,7 +10084,7 @@
                     <a:bodyPr/>
                     <a:lstStyle/>
                     <a:p>
-                      <a:pPr algn="r" indent="0" marL="0">
+                      <a:pPr marL="0" indent="0" algn="r">
                         <a:buNone/>
                       </a:pPr>
                       <a:r>
@@ -10016,7 +10098,7 @@
                       <a:endParaRPr lang="en-US" sz="1300" dirty="0"/>
                     </a:p>
                   </a:txBody>
-                  <a:tcPr marL="91440" marR="91440" marT="45720" marB="45720" anchor="ctr">
+                  <a:tcPr anchor="ctr">
                     <a:lnL w="6350" cap="flat" cmpd="sng" algn="ctr">
                       <a:solidFill>
                         <a:srgbClr val="1E293B"/>
@@ -10058,6 +10140,11 @@
                     </a:solidFill>
                   </a:tcPr>
                 </a:tc>
+                <a:extLst>
+                  <a:ext uri="{0D108BD9-81ED-4DB2-BD59-A6C34878D82A}">
+                    <a16:rowId xmlns:a16="http://schemas.microsoft.com/office/drawing/2014/main" val="10006"/>
+                  </a:ext>
+                </a:extLst>
               </a:tr>
               <a:tr h="438912">
                 <a:tc>
@@ -10065,7 +10152,7 @@
                     <a:bodyPr/>
                     <a:lstStyle/>
                     <a:p>
-                      <a:pPr algn="ctr" indent="0" marL="0">
+                      <a:pPr marL="0" indent="0" algn="ctr">
                         <a:buNone/>
                       </a:pPr>
                       <a:r>
@@ -10079,7 +10166,7 @@
                       <a:endParaRPr lang="en-US" sz="1300" dirty="0"/>
                     </a:p>
                   </a:txBody>
-                  <a:tcPr marL="91440" marR="91440" marT="45720" marB="45720" anchor="ctr">
+                  <a:tcPr anchor="ctr">
                     <a:lnL w="6350" cap="flat" cmpd="sng" algn="ctr">
                       <a:solidFill>
                         <a:srgbClr val="1E293B"/>
@@ -10126,7 +10213,7 @@
                     <a:bodyPr/>
                     <a:lstStyle/>
                     <a:p>
-                      <a:pPr algn="r" indent="0" marL="0">
+                      <a:pPr marL="0" indent="0" algn="r">
                         <a:buNone/>
                       </a:pPr>
                       <a:r>
@@ -10140,7 +10227,7 @@
                       <a:endParaRPr lang="en-US" sz="1300" dirty="0"/>
                     </a:p>
                   </a:txBody>
-                  <a:tcPr marL="91440" marR="91440" marT="45720" marB="45720" anchor="ctr">
+                  <a:tcPr anchor="ctr">
                     <a:lnL w="6350" cap="flat" cmpd="sng" algn="ctr">
                       <a:solidFill>
                         <a:srgbClr val="1E293B"/>
@@ -10187,7 +10274,7 @@
                     <a:bodyPr/>
                     <a:lstStyle/>
                     <a:p>
-                      <a:pPr algn="r" indent="0" marL="0">
+                      <a:pPr marL="0" indent="0" algn="r">
                         <a:buNone/>
                       </a:pPr>
                       <a:r>
@@ -10201,7 +10288,7 @@
                       <a:endParaRPr lang="en-US" sz="1300" dirty="0"/>
                     </a:p>
                   </a:txBody>
-                  <a:tcPr marL="91440" marR="91440" marT="45720" marB="45720" anchor="ctr">
+                  <a:tcPr anchor="ctr">
                     <a:lnL w="6350" cap="flat" cmpd="sng" algn="ctr">
                       <a:solidFill>
                         <a:srgbClr val="1E293B"/>
@@ -10248,7 +10335,7 @@
                     <a:bodyPr/>
                     <a:lstStyle/>
                     <a:p>
-                      <a:pPr algn="r" indent="0" marL="0">
+                      <a:pPr marL="0" indent="0" algn="r">
                         <a:buNone/>
                       </a:pPr>
                       <a:r>
@@ -10262,7 +10349,7 @@
                       <a:endParaRPr lang="en-US" sz="1300" dirty="0"/>
                     </a:p>
                   </a:txBody>
-                  <a:tcPr marL="91440" marR="91440" marT="45720" marB="45720" anchor="ctr">
+                  <a:tcPr anchor="ctr">
                     <a:lnL w="6350" cap="flat" cmpd="sng" algn="ctr">
                       <a:solidFill>
                         <a:srgbClr val="1E293B"/>
@@ -10304,6 +10391,11 @@
                     </a:solidFill>
                   </a:tcPr>
                 </a:tc>
+                <a:extLst>
+                  <a:ext uri="{0D108BD9-81ED-4DB2-BD59-A6C34878D82A}">
+                    <a16:rowId xmlns:a16="http://schemas.microsoft.com/office/drawing/2014/main" val="10007"/>
+                  </a:ext>
+                </a:extLst>
               </a:tr>
               <a:tr h="438912">
                 <a:tc>
@@ -10311,7 +10403,7 @@
                     <a:bodyPr/>
                     <a:lstStyle/>
                     <a:p>
-                      <a:pPr algn="ctr" indent="0" marL="0">
+                      <a:pPr marL="0" indent="0" algn="ctr">
                         <a:buNone/>
                       </a:pPr>
                       <a:r>
@@ -10325,7 +10417,7 @@
                       <a:endParaRPr lang="en-US" sz="1300" dirty="0"/>
                     </a:p>
                   </a:txBody>
-                  <a:tcPr marL="91440" marR="91440" marT="45720" marB="45720" anchor="ctr">
+                  <a:tcPr anchor="ctr">
                     <a:lnL w="6350" cap="flat" cmpd="sng" algn="ctr">
                       <a:solidFill>
                         <a:srgbClr val="1E293B"/>
@@ -10372,7 +10464,7 @@
                     <a:bodyPr/>
                     <a:lstStyle/>
                     <a:p>
-                      <a:pPr algn="r" indent="0" marL="0">
+                      <a:pPr marL="0" indent="0" algn="r">
                         <a:buNone/>
                       </a:pPr>
                       <a:r>
@@ -10386,7 +10478,7 @@
                       <a:endParaRPr lang="en-US" sz="1300" dirty="0"/>
                     </a:p>
                   </a:txBody>
-                  <a:tcPr marL="91440" marR="91440" marT="45720" marB="45720" anchor="ctr">
+                  <a:tcPr anchor="ctr">
                     <a:lnL w="6350" cap="flat" cmpd="sng" algn="ctr">
                       <a:solidFill>
                         <a:srgbClr val="1E293B"/>
@@ -10433,7 +10525,7 @@
                     <a:bodyPr/>
                     <a:lstStyle/>
                     <a:p>
-                      <a:pPr algn="r" indent="0" marL="0">
+                      <a:pPr marL="0" indent="0" algn="r">
                         <a:buNone/>
                       </a:pPr>
                       <a:r>
@@ -10447,7 +10539,7 @@
                       <a:endParaRPr lang="en-US" sz="1300" dirty="0"/>
                     </a:p>
                   </a:txBody>
-                  <a:tcPr marL="91440" marR="91440" marT="45720" marB="45720" anchor="ctr">
+                  <a:tcPr anchor="ctr">
                     <a:lnL w="6350" cap="flat" cmpd="sng" algn="ctr">
                       <a:solidFill>
                         <a:srgbClr val="1E293B"/>
@@ -10494,7 +10586,7 @@
                     <a:bodyPr/>
                     <a:lstStyle/>
                     <a:p>
-                      <a:pPr algn="r" indent="0" marL="0">
+                      <a:pPr marL="0" indent="0" algn="r">
                         <a:buNone/>
                       </a:pPr>
                       <a:r>
@@ -10508,7 +10600,7 @@
                       <a:endParaRPr lang="en-US" sz="1300" dirty="0"/>
                     </a:p>
                   </a:txBody>
-                  <a:tcPr marL="91440" marR="91440" marT="45720" marB="45720" anchor="ctr">
+                  <a:tcPr anchor="ctr">
                     <a:lnL w="6350" cap="flat" cmpd="sng" algn="ctr">
                       <a:solidFill>
                         <a:srgbClr val="1E293B"/>
@@ -10550,6 +10642,11 @@
                     </a:solidFill>
                   </a:tcPr>
                 </a:tc>
+                <a:extLst>
+                  <a:ext uri="{0D108BD9-81ED-4DB2-BD59-A6C34878D82A}">
+                    <a16:rowId xmlns:a16="http://schemas.microsoft.com/office/drawing/2014/main" val="10008"/>
+                  </a:ext>
+                </a:extLst>
               </a:tr>
             </a:tbl>
           </a:graphicData>
@@ -10571,6 +10668,7 @@
         <a:solidFill>
           <a:srgbClr val="0A0F1E"/>
         </a:solidFill>
+        <a:effectLst/>
       </p:bgPr>
     </p:bg>
     <p:spTree>
@@ -10606,6 +10704,13 @@
           </a:solidFill>
           <a:ln/>
         </p:spPr>
+        <p:txBody>
+          <a:bodyPr/>
+          <a:lstStyle/>
+          <a:p>
+            <a:endParaRPr lang="en-US"/>
+          </a:p>
+        </p:txBody>
       </p:sp>
       <p:sp>
         <p:nvSpPr>
@@ -10626,6 +10731,13 @@
           </a:solidFill>
           <a:ln/>
         </p:spPr>
+        <p:txBody>
+          <a:bodyPr/>
+          <a:lstStyle/>
+          <a:p>
+            <a:endParaRPr lang="en-US"/>
+          </a:p>
+        </p:txBody>
       </p:sp>
       <p:sp>
         <p:nvSpPr>
@@ -10648,11 +10760,11 @@
           <a:bodyPr wrap="square" lIns="0" tIns="0" rIns="0" bIns="0" rtlCol="0" anchor="ctr"/>
           <a:lstStyle/>
           <a:p>
-            <a:pPr indent="0" marL="0">
+            <a:pPr marL="0" indent="0">
               <a:buNone/>
             </a:pPr>
             <a:r>
-              <a:rPr lang="en-US" sz="1000" b="1" spc="500" kern="0" dirty="0">
+              <a:rPr lang="en-US" sz="1000" b="1" kern="0" spc="500" dirty="0">
                 <a:solidFill>
                   <a:srgbClr val="06B6D4"/>
                 </a:solidFill>
@@ -10684,7 +10796,7 @@
           <a:bodyPr wrap="square" lIns="0" tIns="0" rIns="0" bIns="0" rtlCol="0" anchor="ctr"/>
           <a:lstStyle/>
           <a:p>
-            <a:pPr indent="0" marL="0">
+            <a:pPr marL="0" indent="0">
               <a:buNone/>
             </a:pPr>
             <a:r>
@@ -10718,13 +10830,20 @@
           </a:solidFill>
           <a:ln/>
           <a:effectLst>
-            <a:outerShdw sx="100000" sy="100000" kx="0" ky="0" algn="bl" rotWithShape="0" blurRad="127000" dist="38100" dir="8100000">
+            <a:outerShdw blurRad="127000" dist="38100" dir="8100000" algn="bl" rotWithShape="0">
               <a:srgbClr val="000000">
                 <a:alpha val="30000"/>
               </a:srgbClr>
             </a:outerShdw>
           </a:effectLst>
         </p:spPr>
+        <p:txBody>
+          <a:bodyPr/>
+          <a:lstStyle/>
+          <a:p>
+            <a:endParaRPr lang="en-US"/>
+          </a:p>
+        </p:txBody>
       </p:sp>
       <p:sp>
         <p:nvSpPr>
@@ -10745,17 +10864,24 @@
           </a:solidFill>
           <a:ln/>
         </p:spPr>
+        <p:txBody>
+          <a:bodyPr/>
+          <a:lstStyle/>
+          <a:p>
+            <a:endParaRPr lang="en-US"/>
+          </a:p>
+        </p:txBody>
       </p:sp>
       <p:pic>
         <p:nvPicPr>
-          <p:cNvPr id="8" name="Image 0" descr="preencoded.png">    </p:cNvPr>
+          <p:cNvPr id="8" name="Image 0" descr="preencoded.png"/>
           <p:cNvPicPr>
             <a:picLocks noChangeAspect="1"/>
           </p:cNvPicPr>
           <p:nvPr/>
         </p:nvPicPr>
         <p:blipFill>
-          <a:blip r:embed="rId1"/>
+          <a:blip r:embed="rId3"/>
           <a:stretch>
             <a:fillRect/>
           </a:stretch>
@@ -10791,7 +10917,7 @@
           <a:bodyPr wrap="square" lIns="0" tIns="0" rIns="0" bIns="0" rtlCol="0" anchor="ctr"/>
           <a:lstStyle/>
           <a:p>
-            <a:pPr indent="0" marL="0">
+            <a:pPr marL="0" indent="0">
               <a:buNone/>
             </a:pPr>
             <a:r>
@@ -10827,7 +10953,7 @@
           <a:bodyPr wrap="square" lIns="0" tIns="0" rIns="0" bIns="0" rtlCol="0" anchor="ctr"/>
           <a:lstStyle/>
           <a:p>
-            <a:pPr indent="0" marL="0">
+            <a:pPr marL="0" indent="0">
               <a:lnSpc>
                 <a:spcPct val="135000"/>
               </a:lnSpc>
@@ -10864,13 +10990,20 @@
           </a:solidFill>
           <a:ln/>
           <a:effectLst>
-            <a:outerShdw sx="100000" sy="100000" kx="0" ky="0" algn="bl" rotWithShape="0" blurRad="127000" dist="38100" dir="8100000">
+            <a:outerShdw blurRad="127000" dist="38100" dir="8100000" algn="bl" rotWithShape="0">
               <a:srgbClr val="000000">
                 <a:alpha val="30000"/>
               </a:srgbClr>
             </a:outerShdw>
           </a:effectLst>
         </p:spPr>
+        <p:txBody>
+          <a:bodyPr/>
+          <a:lstStyle/>
+          <a:p>
+            <a:endParaRPr lang="en-US"/>
+          </a:p>
+        </p:txBody>
       </p:sp>
       <p:sp>
         <p:nvSpPr>
@@ -10891,17 +11024,24 @@
           </a:solidFill>
           <a:ln/>
         </p:spPr>
+        <p:txBody>
+          <a:bodyPr/>
+          <a:lstStyle/>
+          <a:p>
+            <a:endParaRPr lang="en-US"/>
+          </a:p>
+        </p:txBody>
       </p:sp>
       <p:pic>
         <p:nvPicPr>
-          <p:cNvPr id="13" name="Image 1" descr="preencoded.png">    </p:cNvPr>
+          <p:cNvPr id="13" name="Image 1" descr="preencoded.png"/>
           <p:cNvPicPr>
             <a:picLocks noChangeAspect="1"/>
           </p:cNvPicPr>
           <p:nvPr/>
         </p:nvPicPr>
         <p:blipFill>
-          <a:blip r:embed="rId2"/>
+          <a:blip r:embed="rId4"/>
           <a:stretch>
             <a:fillRect/>
           </a:stretch>
@@ -10937,7 +11077,7 @@
           <a:bodyPr wrap="square" lIns="0" tIns="0" rIns="0" bIns="0" rtlCol="0" anchor="ctr"/>
           <a:lstStyle/>
           <a:p>
-            <a:pPr indent="0" marL="0">
+            <a:pPr marL="0" indent="0">
               <a:buNone/>
             </a:pPr>
             <a:r>
@@ -10973,7 +11113,7 @@
           <a:bodyPr wrap="square" lIns="0" tIns="0" rIns="0" bIns="0" rtlCol="0" anchor="ctr"/>
           <a:lstStyle/>
           <a:p>
-            <a:pPr indent="0" marL="0">
+            <a:pPr marL="0" indent="0">
               <a:lnSpc>
                 <a:spcPct val="135000"/>
               </a:lnSpc>
@@ -11010,13 +11150,20 @@
           </a:solidFill>
           <a:ln/>
           <a:effectLst>
-            <a:outerShdw sx="100000" sy="100000" kx="0" ky="0" algn="bl" rotWithShape="0" blurRad="127000" dist="38100" dir="8100000">
+            <a:outerShdw blurRad="127000" dist="38100" dir="8100000" algn="bl" rotWithShape="0">
               <a:srgbClr val="000000">
                 <a:alpha val="30000"/>
               </a:srgbClr>
             </a:outerShdw>
           </a:effectLst>
         </p:spPr>
+        <p:txBody>
+          <a:bodyPr/>
+          <a:lstStyle/>
+          <a:p>
+            <a:endParaRPr lang="en-US"/>
+          </a:p>
+        </p:txBody>
       </p:sp>
       <p:sp>
         <p:nvSpPr>
@@ -11037,17 +11184,24 @@
           </a:solidFill>
           <a:ln/>
         </p:spPr>
+        <p:txBody>
+          <a:bodyPr/>
+          <a:lstStyle/>
+          <a:p>
+            <a:endParaRPr lang="en-US"/>
+          </a:p>
+        </p:txBody>
       </p:sp>
       <p:pic>
         <p:nvPicPr>
-          <p:cNvPr id="18" name="Image 2" descr="preencoded.png">    </p:cNvPr>
+          <p:cNvPr id="18" name="Image 2" descr="preencoded.png"/>
           <p:cNvPicPr>
             <a:picLocks noChangeAspect="1"/>
           </p:cNvPicPr>
           <p:nvPr/>
         </p:nvPicPr>
         <p:blipFill>
-          <a:blip r:embed="rId3"/>
+          <a:blip r:embed="rId5"/>
           <a:stretch>
             <a:fillRect/>
           </a:stretch>
@@ -11083,7 +11237,7 @@
           <a:bodyPr wrap="square" lIns="0" tIns="0" rIns="0" bIns="0" rtlCol="0" anchor="ctr"/>
           <a:lstStyle/>
           <a:p>
-            <a:pPr indent="0" marL="0">
+            <a:pPr marL="0" indent="0">
               <a:buNone/>
             </a:pPr>
             <a:r>
@@ -11119,7 +11273,7 @@
           <a:bodyPr wrap="square" lIns="0" tIns="0" rIns="0" bIns="0" rtlCol="0" anchor="ctr"/>
           <a:lstStyle/>
           <a:p>
-            <a:pPr indent="0" marL="0">
+            <a:pPr marL="0" indent="0">
               <a:lnSpc>
                 <a:spcPct val="135000"/>
               </a:lnSpc>
@@ -11156,13 +11310,20 @@
           </a:solidFill>
           <a:ln/>
           <a:effectLst>
-            <a:outerShdw sx="100000" sy="100000" kx="0" ky="0" algn="bl" rotWithShape="0" blurRad="127000" dist="38100" dir="8100000">
+            <a:outerShdw blurRad="127000" dist="38100" dir="8100000" algn="bl" rotWithShape="0">
               <a:srgbClr val="000000">
                 <a:alpha val="30000"/>
               </a:srgbClr>
             </a:outerShdw>
           </a:effectLst>
         </p:spPr>
+        <p:txBody>
+          <a:bodyPr/>
+          <a:lstStyle/>
+          <a:p>
+            <a:endParaRPr lang="en-US"/>
+          </a:p>
+        </p:txBody>
       </p:sp>
       <p:sp>
         <p:nvSpPr>
@@ -11183,17 +11344,24 @@
           </a:solidFill>
           <a:ln/>
         </p:spPr>
+        <p:txBody>
+          <a:bodyPr/>
+          <a:lstStyle/>
+          <a:p>
+            <a:endParaRPr lang="en-US"/>
+          </a:p>
+        </p:txBody>
       </p:sp>
       <p:pic>
         <p:nvPicPr>
-          <p:cNvPr id="23" name="Image 3" descr="preencoded.png">    </p:cNvPr>
+          <p:cNvPr id="23" name="Image 3" descr="preencoded.png"/>
           <p:cNvPicPr>
             <a:picLocks noChangeAspect="1"/>
           </p:cNvPicPr>
           <p:nvPr/>
         </p:nvPicPr>
         <p:blipFill>
-          <a:blip r:embed="rId4"/>
+          <a:blip r:embed="rId6"/>
           <a:stretch>
             <a:fillRect/>
           </a:stretch>
@@ -11229,7 +11397,7 @@
           <a:bodyPr wrap="square" lIns="0" tIns="0" rIns="0" bIns="0" rtlCol="0" anchor="ctr"/>
           <a:lstStyle/>
           <a:p>
-            <a:pPr indent="0" marL="0">
+            <a:pPr marL="0" indent="0">
               <a:buNone/>
             </a:pPr>
             <a:r>
@@ -11265,7 +11433,7 @@
           <a:bodyPr wrap="square" lIns="0" tIns="0" rIns="0" bIns="0" rtlCol="0" anchor="ctr"/>
           <a:lstStyle/>
           <a:p>
-            <a:pPr indent="0" marL="0">
+            <a:pPr marL="0" indent="0">
               <a:lnSpc>
                 <a:spcPct val="135000"/>
               </a:lnSpc>
@@ -11302,6 +11470,13 @@
           </a:solidFill>
           <a:ln/>
         </p:spPr>
+        <p:txBody>
+          <a:bodyPr/>
+          <a:lstStyle/>
+          <a:p>
+            <a:endParaRPr lang="en-US"/>
+          </a:p>
+        </p:txBody>
       </p:sp>
       <p:sp>
         <p:nvSpPr>
@@ -11324,7 +11499,7 @@
           <a:bodyPr wrap="square" lIns="0" tIns="0" rIns="0" bIns="0" rtlCol="0" anchor="ctr"/>
           <a:lstStyle/>
           <a:p>
-            <a:pPr algn="ctr" indent="0" marL="0">
+            <a:pPr marL="0" indent="0" algn="ctr">
               <a:buNone/>
             </a:pPr>
             <a:r>
@@ -11640,4 +11815,319 @@
     </a:ext>
   </a:extLst>
 </a:theme>
+</file>
+
+<file path=ppt/theme/theme2.xml><?xml version="1.0" encoding="utf-8"?>
+<a:theme xmlns:a="http://schemas.openxmlformats.org/drawingml/2006/main" name="Office Theme">
+  <a:themeElements>
+    <a:clrScheme name="Office">
+      <a:dk1>
+        <a:sysClr val="windowText" lastClr="000000"/>
+      </a:dk1>
+      <a:lt1>
+        <a:sysClr val="window" lastClr="FFFFFF"/>
+      </a:lt1>
+      <a:dk2>
+        <a:srgbClr val="0E2841"/>
+      </a:dk2>
+      <a:lt2>
+        <a:srgbClr val="E8E8E8"/>
+      </a:lt2>
+      <a:accent1>
+        <a:srgbClr val="156082"/>
+      </a:accent1>
+      <a:accent2>
+        <a:srgbClr val="E97132"/>
+      </a:accent2>
+      <a:accent3>
+        <a:srgbClr val="196B24"/>
+      </a:accent3>
+      <a:accent4>
+        <a:srgbClr val="0F9ED5"/>
+      </a:accent4>
+      <a:accent5>
+        <a:srgbClr val="A02B93"/>
+      </a:accent5>
+      <a:accent6>
+        <a:srgbClr val="4EA72E"/>
+      </a:accent6>
+      <a:hlink>
+        <a:srgbClr val="467886"/>
+      </a:hlink>
+      <a:folHlink>
+        <a:srgbClr val="96607D"/>
+      </a:folHlink>
+    </a:clrScheme>
+    <a:fontScheme name="Office">
+      <a:majorFont>
+        <a:latin typeface="Aptos Display" panose="02110004020202020204"/>
+        <a:ea typeface=""/>
+        <a:cs typeface=""/>
+        <a:font script="Jpan" typeface="游ゴシック Light"/>
+        <a:font script="Hang" typeface="맑은 고딕"/>
+        <a:font script="Hans" typeface="等线 Light"/>
+        <a:font script="Hant" typeface="新細明體"/>
+        <a:font script="Arab" typeface="Times New Roman"/>
+        <a:font script="Hebr" typeface="Times New Roman"/>
+        <a:font script="Thai" typeface="Angsana New"/>
+        <a:font script="Ethi" typeface="Nyala"/>
+        <a:font script="Beng" typeface="Vrinda"/>
+        <a:font script="Gujr" typeface="Shruti"/>
+        <a:font script="Khmr" typeface="MoolBoran"/>
+        <a:font script="Knda" typeface="Tunga"/>
+        <a:font script="Guru" typeface="Raavi"/>
+        <a:font script="Cans" typeface="Euphemia"/>
+        <a:font script="Cher" typeface="Plantagenet Cherokee"/>
+        <a:font script="Yiii" typeface="Microsoft Yi Baiti"/>
+        <a:font script="Tibt" typeface="Microsoft Himalaya"/>
+        <a:font script="Thaa" typeface="MV Boli"/>
+        <a:font script="Deva" typeface="Mangal"/>
+        <a:font script="Telu" typeface="Gautami"/>
+        <a:font script="Taml" typeface="Latha"/>
+        <a:font script="Syrc" typeface="Estrangelo Edessa"/>
+        <a:font script="Orya" typeface="Kalinga"/>
+        <a:font script="Mlym" typeface="Kartika"/>
+        <a:font script="Laoo" typeface="DokChampa"/>
+        <a:font script="Sinh" typeface="Iskoola Pota"/>
+        <a:font script="Mong" typeface="Mongolian Baiti"/>
+        <a:font script="Viet" typeface="Times New Roman"/>
+        <a:font script="Uigh" typeface="Microsoft Uighur"/>
+        <a:font script="Geor" typeface="Sylfaen"/>
+        <a:font script="Armn" typeface="Arial"/>
+        <a:font script="Bugi" typeface="Leelawadee UI"/>
+        <a:font script="Bopo" typeface="Microsoft JhengHei"/>
+        <a:font script="Java" typeface="Javanese Text"/>
+        <a:font script="Lisu" typeface="Segoe UI"/>
+        <a:font script="Mymr" typeface="Myanmar Text"/>
+        <a:font script="Nkoo" typeface="Ebrima"/>
+        <a:font script="Olck" typeface="Nirmala UI"/>
+        <a:font script="Osma" typeface="Ebrima"/>
+        <a:font script="Phag" typeface="Phagspa"/>
+        <a:font script="Syrn" typeface="Estrangelo Edessa"/>
+        <a:font script="Syrj" typeface="Estrangelo Edessa"/>
+        <a:font script="Syre" typeface="Estrangelo Edessa"/>
+        <a:font script="Sora" typeface="Nirmala UI"/>
+        <a:font script="Tale" typeface="Microsoft Tai Le"/>
+        <a:font script="Talu" typeface="Microsoft New Tai Lue"/>
+        <a:font script="Tfng" typeface="Ebrima"/>
+      </a:majorFont>
+      <a:minorFont>
+        <a:latin typeface="Aptos" panose="02110004020202020204"/>
+        <a:ea typeface=""/>
+        <a:cs typeface=""/>
+        <a:font script="Jpan" typeface="游ゴシック"/>
+        <a:font script="Hang" typeface="맑은 고딕"/>
+        <a:font script="Hans" typeface="等线"/>
+        <a:font script="Hant" typeface="新細明體"/>
+        <a:font script="Arab" typeface="Arial"/>
+        <a:font script="Hebr" typeface="Arial"/>
+        <a:font script="Thai" typeface="Cordia New"/>
+        <a:font script="Ethi" typeface="Nyala"/>
+        <a:font script="Beng" typeface="Vrinda"/>
+        <a:font script="Gujr" typeface="Shruti"/>
+        <a:font script="Khmr" typeface="DaunPenh"/>
+        <a:font script="Knda" typeface="Tunga"/>
+        <a:font script="Guru" typeface="Raavi"/>
+        <a:font script="Cans" typeface="Euphemia"/>
+        <a:font script="Cher" typeface="Plantagenet Cherokee"/>
+        <a:font script="Yiii" typeface="Microsoft Yi Baiti"/>
+        <a:font script="Tibt" typeface="Microsoft Himalaya"/>
+        <a:font script="Thaa" typeface="MV Boli"/>
+        <a:font script="Deva" typeface="Mangal"/>
+        <a:font script="Telu" typeface="Gautami"/>
+        <a:font script="Taml" typeface="Latha"/>
+        <a:font script="Syrc" typeface="Estrangelo Edessa"/>
+        <a:font script="Orya" typeface="Kalinga"/>
+        <a:font script="Mlym" typeface="Kartika"/>
+        <a:font script="Laoo" typeface="DokChampa"/>
+        <a:font script="Sinh" typeface="Iskoola Pota"/>
+        <a:font script="Mong" typeface="Mongolian Baiti"/>
+        <a:font script="Viet" typeface="Arial"/>
+        <a:font script="Uigh" typeface="Microsoft Uighur"/>
+        <a:font script="Geor" typeface="Sylfaen"/>
+        <a:font script="Armn" typeface="Arial"/>
+        <a:font script="Bugi" typeface="Leelawadee UI"/>
+        <a:font script="Bopo" typeface="Microsoft JhengHei"/>
+        <a:font script="Java" typeface="Javanese Text"/>
+        <a:font script="Lisu" typeface="Segoe UI"/>
+        <a:font script="Mymr" typeface="Myanmar Text"/>
+        <a:font script="Nkoo" typeface="Ebrima"/>
+        <a:font script="Olck" typeface="Nirmala UI"/>
+        <a:font script="Osma" typeface="Ebrima"/>
+        <a:font script="Phag" typeface="Phagspa"/>
+        <a:font script="Syrn" typeface="Estrangelo Edessa"/>
+        <a:font script="Syrj" typeface="Estrangelo Edessa"/>
+        <a:font script="Syre" typeface="Estrangelo Edessa"/>
+        <a:font script="Sora" typeface="Nirmala UI"/>
+        <a:font script="Tale" typeface="Microsoft Tai Le"/>
+        <a:font script="Talu" typeface="Microsoft New Tai Lue"/>
+        <a:font script="Tfng" typeface="Ebrima"/>
+      </a:minorFont>
+    </a:fontScheme>
+    <a:fmtScheme name="Office">
+      <a:fillStyleLst>
+        <a:solidFill>
+          <a:schemeClr val="phClr"/>
+        </a:solidFill>
+        <a:gradFill rotWithShape="1">
+          <a:gsLst>
+            <a:gs pos="0">
+              <a:schemeClr val="phClr">
+                <a:lumMod val="110000"/>
+                <a:satMod val="105000"/>
+                <a:tint val="67000"/>
+              </a:schemeClr>
+            </a:gs>
+            <a:gs pos="50000">
+              <a:schemeClr val="phClr">
+                <a:lumMod val="105000"/>
+                <a:satMod val="103000"/>
+                <a:tint val="73000"/>
+              </a:schemeClr>
+            </a:gs>
+            <a:gs pos="100000">
+              <a:schemeClr val="phClr">
+                <a:lumMod val="105000"/>
+                <a:satMod val="109000"/>
+                <a:tint val="81000"/>
+              </a:schemeClr>
+            </a:gs>
+          </a:gsLst>
+          <a:lin ang="5400000" scaled="0"/>
+        </a:gradFill>
+        <a:gradFill rotWithShape="1">
+          <a:gsLst>
+            <a:gs pos="0">
+              <a:schemeClr val="phClr">
+                <a:satMod val="103000"/>
+                <a:lumMod val="102000"/>
+                <a:tint val="94000"/>
+              </a:schemeClr>
+            </a:gs>
+            <a:gs pos="50000">
+              <a:schemeClr val="phClr">
+                <a:satMod val="110000"/>
+                <a:lumMod val="100000"/>
+                <a:shade val="100000"/>
+              </a:schemeClr>
+            </a:gs>
+            <a:gs pos="100000">
+              <a:schemeClr val="phClr">
+                <a:lumMod val="99000"/>
+                <a:satMod val="120000"/>
+                <a:shade val="78000"/>
+              </a:schemeClr>
+            </a:gs>
+          </a:gsLst>
+          <a:lin ang="5400000" scaled="0"/>
+        </a:gradFill>
+      </a:fillStyleLst>
+      <a:lnStyleLst>
+        <a:ln w="12700" cap="flat" cmpd="sng" algn="ctr">
+          <a:solidFill>
+            <a:schemeClr val="phClr"/>
+          </a:solidFill>
+          <a:prstDash val="solid"/>
+          <a:miter lim="800000"/>
+        </a:ln>
+        <a:ln w="19050" cap="flat" cmpd="sng" algn="ctr">
+          <a:solidFill>
+            <a:schemeClr val="phClr"/>
+          </a:solidFill>
+          <a:prstDash val="solid"/>
+          <a:miter lim="800000"/>
+        </a:ln>
+        <a:ln w="25400" cap="flat" cmpd="sng" algn="ctr">
+          <a:solidFill>
+            <a:schemeClr val="phClr"/>
+          </a:solidFill>
+          <a:prstDash val="solid"/>
+          <a:miter lim="800000"/>
+        </a:ln>
+      </a:lnStyleLst>
+      <a:effectStyleLst>
+        <a:effectStyle>
+          <a:effectLst/>
+        </a:effectStyle>
+        <a:effectStyle>
+          <a:effectLst/>
+        </a:effectStyle>
+        <a:effectStyle>
+          <a:effectLst>
+            <a:outerShdw blurRad="57150" dist="19050" dir="5400000" algn="ctr" rotWithShape="0">
+              <a:srgbClr val="000000">
+                <a:alpha val="63000"/>
+              </a:srgbClr>
+            </a:outerShdw>
+          </a:effectLst>
+        </a:effectStyle>
+      </a:effectStyleLst>
+      <a:bgFillStyleLst>
+        <a:solidFill>
+          <a:schemeClr val="phClr"/>
+        </a:solidFill>
+        <a:solidFill>
+          <a:schemeClr val="phClr">
+            <a:tint val="95000"/>
+            <a:satMod val="170000"/>
+          </a:schemeClr>
+        </a:solidFill>
+        <a:gradFill rotWithShape="1">
+          <a:gsLst>
+            <a:gs pos="0">
+              <a:schemeClr val="phClr">
+                <a:tint val="93000"/>
+                <a:satMod val="150000"/>
+                <a:shade val="98000"/>
+                <a:lumMod val="102000"/>
+              </a:schemeClr>
+            </a:gs>
+            <a:gs pos="50000">
+              <a:schemeClr val="phClr">
+                <a:tint val="98000"/>
+                <a:satMod val="130000"/>
+                <a:shade val="90000"/>
+                <a:lumMod val="103000"/>
+              </a:schemeClr>
+            </a:gs>
+            <a:gs pos="100000">
+              <a:schemeClr val="phClr">
+                <a:shade val="63000"/>
+                <a:satMod val="120000"/>
+              </a:schemeClr>
+            </a:gs>
+          </a:gsLst>
+          <a:lin ang="5400000" scaled="0"/>
+        </a:gradFill>
+      </a:bgFillStyleLst>
+    </a:fmtScheme>
+  </a:themeElements>
+  <a:objectDefaults>
+    <a:lnDef>
+      <a:spPr/>
+      <a:bodyPr/>
+      <a:lstStyle/>
+      <a:style>
+        <a:lnRef idx="2">
+          <a:schemeClr val="accent1"/>
+        </a:lnRef>
+        <a:fillRef idx="0">
+          <a:schemeClr val="accent1"/>
+        </a:fillRef>
+        <a:effectRef idx="1">
+          <a:schemeClr val="accent1"/>
+        </a:effectRef>
+        <a:fontRef idx="minor">
+          <a:schemeClr val="tx1"/>
+        </a:fontRef>
+      </a:style>
+    </a:lnDef>
+  </a:objectDefaults>
+  <a:extraClrSchemeLst/>
+  <a:extLst>
+    <a:ext uri="{05A4C25C-085E-4340-85A3-A5531E510DB2}">
+      <thm15:themeFamily xmlns:thm15="http://schemas.microsoft.com/office/thememl/2012/main" name="Office Theme" id="{2E142A2C-CD16-42D6-873A-C26D2A0506FA}" vid="{1BDDFF52-6CD6-40A5-AB3C-68EB2F1E4D0A}"/>
+    </a:ext>
+  </a:extLst>
+</a:theme>
 </file>